--- a/stepik/razdel/01/presentation/output/presentation_stepik_1.pptx
+++ b/stepik/razdel/01/presentation/output/presentation_stepik_1.pptx
@@ -51,9 +51,6 @@
     <p:sldId id="299" r:id="rId45"/>
     <p:sldId id="300" r:id="rId46"/>
     <p:sldId id="301" r:id="rId47"/>
-    <p:sldId id="302" r:id="rId48"/>
-    <p:sldId id="303" r:id="rId49"/>
-    <p:sldId id="304" r:id="rId50"/>
   </p:sldIdLst>
   <p:sldSz cx="9144000" cy="5143500" type="screen16x9"/>
   <p:notesSz cx="6858000" cy="9144000"/>
@@ -3308,6 +3305,19 @@
               <a:t> Программа для запуска одной ОС внутри другой</a:t>
             </a:r>
           </a:p>
+          <a:p>
+            <a:pPr lvl="0" indent="0" marL="0">
+              <a:buNone/>
+            </a:pPr>
+            <a:r>
+              <a:rPr b="1"/>
+              <a:t>Пояснение:</a:t>
+            </a:r>
+            <a:r>
+              <a:rPr/>
+              <a:t> Виртуальная машина эмулирует аппаратное обеспечение и позволяет запускать гостевую операционную систему внутри хостовой.</a:t>
+            </a:r>
+          </a:p>
         </p:txBody>
       </p:sp>
       <p:pic>
@@ -3449,6 +3459,19 @@
               <a:t> Да</a:t>
             </a:r>
           </a:p>
+          <a:p>
+            <a:pPr lvl="0" indent="0" marL="0">
+              <a:buNone/>
+            </a:pPr>
+            <a:r>
+              <a:rPr b="1"/>
+              <a:t>Пояснение:</a:t>
+            </a:r>
+            <a:r>
+              <a:rPr/>
+              <a:t> Linux был успешно установлен и запущен на виртуальной машине.</a:t>
+            </a:r>
+          </a:p>
         </p:txBody>
       </p:sp>
       <p:pic>
@@ -3647,8 +3670,12 @@
               <a:buNone/>
             </a:pPr>
             <a:r>
-              <a:rPr/>
-              <a:t>Текст “Hello, Linux!” шрифтом FreeMono, формат FODT.</a:t>
+              <a:rPr b="1"/>
+              <a:t>Пояснение:</a:t>
+            </a:r>
+            <a:r>
+              <a:rPr/>
+              <a:t> Документ создан в LibreOffice Writer, использован шрифт FreeMono, сохранён в формате Flat XML (FODT), как требует задание.</a:t>
             </a:r>
           </a:p>
         </p:txBody>
@@ -3735,9 +3762,81 @@
           <a:chExt cx="0" cy="0"/>
         </a:xfrm>
       </p:grpSpPr>
+      <p:sp>
+        <p:nvSpPr>
+          <p:cNvPr id="2" name="Title 1"/>
+          <p:cNvSpPr>
+            <a:spLocks noGrp="1"/>
+          </p:cNvSpPr>
+          <p:nvPr>
+            <p:ph type="title"/>
+          </p:nvPr>
+        </p:nvSpPr>
+        <p:spPr>
+          <a:xfrm>
+            <a:off x="457201" y="204787"/>
+            <a:ext cx="3008313" cy="871538"/>
+          </a:xfrm>
+        </p:spPr>
+        <p:txBody>
+          <a:bodyPr/>
+          <a:lstStyle/>
+          <a:p>
+            <a:pPr lvl="0" indent="0" marL="0">
+              <a:buNone/>
+            </a:pPr>
+            <a:r>
+              <a:rPr/>
+              <a:t>Вопрос 7. Расширение пакетов в Ubuntu</a:t>
+            </a:r>
+          </a:p>
+        </p:txBody>
+      </p:sp>
+      <p:sp>
+        <p:nvSpPr>
+          <p:cNvPr id="4" name="Text Placeholder 3"/>
+          <p:cNvSpPr>
+            <a:spLocks noGrp="1"/>
+          </p:cNvSpPr>
+          <p:nvPr>
+            <p:ph idx="2" sz="half" type="body"/>
+          </p:nvPr>
+        </p:nvSpPr>
+        <p:spPr/>
+        <p:txBody>
+          <a:bodyPr/>
+          <a:lstStyle/>
+          <a:p>
+            <a:pPr lvl="0" indent="0" marL="0">
+              <a:buNone/>
+            </a:pPr>
+            <a:r>
+              <a:rPr b="1"/>
+              <a:t>Ответ:</a:t>
+            </a:r>
+            <a:r>
+              <a:rPr/>
+              <a:t> deb</a:t>
+            </a:r>
+          </a:p>
+          <a:p>
+            <a:pPr lvl="0" indent="0" marL="0">
+              <a:buNone/>
+            </a:pPr>
+            <a:r>
+              <a:rPr b="1"/>
+              <a:t>Пояснение:</a:t>
+            </a:r>
+            <a:r>
+              <a:rPr/>
+              <a:t> В Ubuntu и других Debian-подобных системах установочные пакеты имеют расширение .deb. В Fedora (которую я ставила) — .rpm, но вопрос про Ubuntu.</a:t>
+            </a:r>
+          </a:p>
+        </p:txBody>
+      </p:sp>
       <p:pic>
         <p:nvPicPr>
-          <p:cNvPr descr="image/7.png" id="0" name="Picture 1"/>
+          <p:cNvPr descr="image/8.png" id="0" name="Picture 1"/>
           <p:cNvPicPr>
             <a:picLocks noGrp="1" noChangeAspect="1"/>
           </p:cNvPicPr>
@@ -3751,8 +3850,8 @@
         </p:blipFill>
         <p:spPr bwMode="auto">
           <a:xfrm>
-            <a:off x="1028700" y="1193800"/>
-            <a:ext cx="7073900" cy="2882900"/>
+            <a:off x="3568700" y="330200"/>
+            <a:ext cx="5105400" cy="3632200"/>
           </a:xfrm>
           <a:prstGeom prst="rect">
             <a:avLst/>
@@ -3773,8 +3872,8 @@
         </p:nvSpPr>
         <p:spPr>
           <a:xfrm>
-            <a:off x="457200" y="4076700"/>
-            <a:ext cx="8229600" cy="508000"/>
+            <a:off x="3568700" y="4076700"/>
+            <a:ext cx="5105400" cy="508000"/>
           </a:xfrm>
           <a:prstGeom prst="rect">
             <a:avLst/>
@@ -3790,7 +3889,7 @@
             </a:pPr>
             <a:r>
               <a:rPr/>
-              <a:t>Рисунок 7: Вопрос 6 продолжение</a:t>
+              <a:t>Рисунок 7: Вопрос 7</a:t>
             </a:r>
           </a:p>
         </p:txBody>
@@ -3842,7 +3941,7 @@
             </a:pPr>
             <a:r>
               <a:rPr/>
-              <a:t>Вопрос 7. Расширение пакетов в Ubuntu</a:t>
+              <a:t>Вопрос 8. VLC — фамилия автора</a:t>
             </a:r>
           </a:p>
         </p:txBody>
@@ -3871,157 +3970,20 @@
             </a:r>
             <a:r>
               <a:rPr/>
-              <a:t> deb</a:t>
-            </a:r>
-          </a:p>
-          <a:p>
-            <a:pPr lvl="0" indent="0" marL="0">
-              <a:buNone/>
-            </a:pPr>
-            <a:r>
-              <a:rPr/>
-              <a:t>В Ubuntu пакеты — .deb, в Fedora — .rpm.</a:t>
-            </a:r>
-          </a:p>
-        </p:txBody>
-      </p:sp>
-      <p:pic>
-        <p:nvPicPr>
-          <p:cNvPr descr="image/8.png" id="0" name="Picture 1"/>
-          <p:cNvPicPr>
-            <a:picLocks noGrp="1" noChangeAspect="1"/>
-          </p:cNvPicPr>
-          <p:nvPr/>
-        </p:nvPicPr>
-        <p:blipFill>
-          <a:blip r:embed="rId2"/>
-          <a:stretch>
-            <a:fillRect/>
-          </a:stretch>
-        </p:blipFill>
-        <p:spPr bwMode="auto">
-          <a:xfrm>
-            <a:off x="3568700" y="330200"/>
-            <a:ext cx="5105400" cy="3632200"/>
-          </a:xfrm>
-          <a:prstGeom prst="rect">
-            <a:avLst/>
-          </a:prstGeom>
-          <a:noFill/>
-          <a:ln w="9525">
-            <a:noFill/>
-            <a:headEnd/>
-            <a:tailEnd/>
-          </a:ln>
-        </p:spPr>
-      </p:pic>
-      <p:sp>
-        <p:nvSpPr>
-          <p:cNvPr id="1" name="TextBox 3"/>
-          <p:cNvSpPr txBox="1"/>
-          <p:nvPr/>
-        </p:nvSpPr>
-        <p:spPr>
-          <a:xfrm>
-            <a:off x="3568700" y="4076700"/>
-            <a:ext cx="5105400" cy="508000"/>
-          </a:xfrm>
-          <a:prstGeom prst="rect">
-            <a:avLst/>
-          </a:prstGeom>
-          <a:noFill/>
-        </p:spPr>
-        <p:txBody>
-          <a:bodyPr/>
-          <a:lstStyle/>
-          <a:p>
-            <a:pPr lvl="0" indent="0" marL="0" algn="ctr">
-              <a:buNone/>
-            </a:pPr>
-            <a:r>
-              <a:rPr/>
-              <a:t>Рисунок 8: Вопрос 7</a:t>
-            </a:r>
-          </a:p>
-        </p:txBody>
-      </p:sp>
-    </p:spTree>
-  </p:cSld>
-</p:sld>
-</file>
-
-<file path=ppt/slides/slide16.xml><?xml version="1.0" encoding="utf-8"?>
-<p:sld xmlns:a="http://schemas.openxmlformats.org/drawingml/2006/main" xmlns:r="http://schemas.openxmlformats.org/officeDocument/2006/relationships" xmlns:p="http://schemas.openxmlformats.org/presentationml/2006/main">
-  <p:cSld>
-    <p:spTree>
-      <p:nvGrpSpPr>
-        <p:cNvPr id="1" name=""/>
-        <p:cNvGrpSpPr/>
-        <p:nvPr/>
-      </p:nvGrpSpPr>
-      <p:grpSpPr>
-        <a:xfrm>
-          <a:off x="0" y="0"/>
-          <a:ext cx="0" cy="0"/>
-          <a:chOff x="0" y="0"/>
-          <a:chExt cx="0" cy="0"/>
-        </a:xfrm>
-      </p:grpSpPr>
-      <p:sp>
-        <p:nvSpPr>
-          <p:cNvPr id="2" name="Title 1"/>
-          <p:cNvSpPr>
-            <a:spLocks noGrp="1"/>
-          </p:cNvSpPr>
-          <p:nvPr>
-            <p:ph type="title"/>
-          </p:nvPr>
-        </p:nvSpPr>
-        <p:spPr>
-          <a:xfrm>
-            <a:off x="457201" y="204787"/>
-            <a:ext cx="3008313" cy="871538"/>
-          </a:xfrm>
-        </p:spPr>
-        <p:txBody>
-          <a:bodyPr/>
-          <a:lstStyle/>
-          <a:p>
-            <a:pPr lvl="0" indent="0" marL="0">
-              <a:buNone/>
-            </a:pPr>
-            <a:r>
-              <a:rPr/>
-              <a:t>Вопрос 8. VLC — фамилия автора</a:t>
-            </a:r>
-          </a:p>
-        </p:txBody>
-      </p:sp>
-      <p:sp>
-        <p:nvSpPr>
-          <p:cNvPr id="4" name="Text Placeholder 3"/>
-          <p:cNvSpPr>
-            <a:spLocks noGrp="1"/>
-          </p:cNvSpPr>
-          <p:nvPr>
-            <p:ph idx="2" sz="half" type="body"/>
-          </p:nvPr>
-        </p:nvSpPr>
-        <p:spPr/>
-        <p:txBody>
-          <a:bodyPr/>
-          <a:lstStyle/>
+              <a:t> Denis-Courmont</a:t>
+            </a:r>
+          </a:p>
           <a:p>
             <a:pPr lvl="0" indent="0" marL="0">
               <a:buNone/>
             </a:pPr>
             <a:r>
               <a:rPr b="1"/>
-              <a:t>Ответ:</a:t>
-            </a:r>
-            <a:r>
-              <a:rPr/>
-              <a:t> Denis-Courmont</a:t>
+              <a:t>Пояснение:</a:t>
+            </a:r>
+            <a:r>
+              <a:rPr/>
+              <a:t> Я установила VLC, зашла в справку, открыла вкладку с авторами — первая фамилия оказалась Denis-Courmont.</a:t>
             </a:r>
           </a:p>
         </p:txBody>
@@ -4081,7 +4043,7 @@
             </a:pPr>
             <a:r>
               <a:rPr/>
-              <a:t>Рисунок 9: Вопрос 8</a:t>
+              <a:t>Рисунок 8: Вопрос 8</a:t>
             </a:r>
           </a:p>
         </p:txBody>
@@ -4091,7 +4053,7 @@
 </p:sld>
 </file>
 
-<file path=ppt/slides/slide17.xml><?xml version="1.0" encoding="utf-8"?>
+<file path=ppt/slides/slide16.xml><?xml version="1.0" encoding="utf-8"?>
 <p:sld xmlns:a="http://schemas.openxmlformats.org/drawingml/2006/main" xmlns:r="http://schemas.openxmlformats.org/officeDocument/2006/relationships" xmlns:p="http://schemas.openxmlformats.org/presentationml/2006/main">
   <p:cSld>
     <p:spTree>
@@ -4163,7 +4125,161 @@
             </a:pPr>
             <a:r>
               <a:rPr/>
-              <a:t>Рисунок 10: Вопрос 8 продолжение</a:t>
+              <a:t>Рисунок 9: Вопрос 8</a:t>
+            </a:r>
+          </a:p>
+        </p:txBody>
+      </p:sp>
+    </p:spTree>
+  </p:cSld>
+</p:sld>
+</file>
+
+<file path=ppt/slides/slide17.xml><?xml version="1.0" encoding="utf-8"?>
+<p:sld xmlns:a="http://schemas.openxmlformats.org/drawingml/2006/main" xmlns:r="http://schemas.openxmlformats.org/officeDocument/2006/relationships" xmlns:p="http://schemas.openxmlformats.org/presentationml/2006/main">
+  <p:cSld>
+    <p:spTree>
+      <p:nvGrpSpPr>
+        <p:cNvPr id="1" name=""/>
+        <p:cNvGrpSpPr/>
+        <p:nvPr/>
+      </p:nvGrpSpPr>
+      <p:grpSpPr>
+        <a:xfrm>
+          <a:off x="0" y="0"/>
+          <a:ext cx="0" cy="0"/>
+          <a:chOff x="0" y="0"/>
+          <a:chExt cx="0" cy="0"/>
+        </a:xfrm>
+      </p:grpSpPr>
+      <p:sp>
+        <p:nvSpPr>
+          <p:cNvPr id="2" name="Title 1"/>
+          <p:cNvSpPr>
+            <a:spLocks noGrp="1"/>
+          </p:cNvSpPr>
+          <p:nvPr>
+            <p:ph type="title"/>
+          </p:nvPr>
+        </p:nvSpPr>
+        <p:spPr>
+          <a:xfrm>
+            <a:off x="457201" y="204787"/>
+            <a:ext cx="3008313" cy="871538"/>
+          </a:xfrm>
+        </p:spPr>
+        <p:txBody>
+          <a:bodyPr/>
+          <a:lstStyle/>
+          <a:p>
+            <a:pPr lvl="0" indent="0" marL="0">
+              <a:buNone/>
+            </a:pPr>
+            <a:r>
+              <a:rPr/>
+              <a:t>Вопрос 9. Update Manager</a:t>
+            </a:r>
+          </a:p>
+        </p:txBody>
+      </p:sp>
+      <p:sp>
+        <p:nvSpPr>
+          <p:cNvPr id="4" name="Text Placeholder 3"/>
+          <p:cNvSpPr>
+            <a:spLocks noGrp="1"/>
+          </p:cNvSpPr>
+          <p:nvPr>
+            <p:ph idx="2" sz="half" type="body"/>
+          </p:nvPr>
+        </p:nvSpPr>
+        <p:spPr/>
+        <p:txBody>
+          <a:bodyPr/>
+          <a:lstStyle/>
+          <a:p>
+            <a:pPr lvl="0" indent="0" marL="0">
+              <a:buNone/>
+            </a:pPr>
+            <a:r>
+              <a:rPr b="1"/>
+              <a:t>Ответ:</a:t>
+            </a:r>
+            <a:r>
+              <a:rPr/>
+              <a:t> - Обновление всей системы - Обновление программ</a:t>
+            </a:r>
+          </a:p>
+          <a:p>
+            <a:pPr lvl="0" indent="0" marL="0">
+              <a:buNone/>
+            </a:pPr>
+            <a:r>
+              <a:rPr b="1"/>
+              <a:t>Пояснение:</a:t>
+            </a:r>
+            <a:r>
+              <a:rPr/>
+              <a:t> Update Manager отвечает за обновление системы и установленных приложений, но не за установку/удаление программ.</a:t>
+            </a:r>
+          </a:p>
+        </p:txBody>
+      </p:sp>
+      <p:pic>
+        <p:nvPicPr>
+          <p:cNvPr descr="image/11.png" id="0" name="Picture 1"/>
+          <p:cNvPicPr>
+            <a:picLocks noGrp="1" noChangeAspect="1"/>
+          </p:cNvPicPr>
+          <p:nvPr/>
+        </p:nvPicPr>
+        <p:blipFill>
+          <a:blip r:embed="rId2"/>
+          <a:stretch>
+            <a:fillRect/>
+          </a:stretch>
+        </p:blipFill>
+        <p:spPr bwMode="auto">
+          <a:xfrm>
+            <a:off x="3568700" y="444500"/>
+            <a:ext cx="5105400" cy="3390900"/>
+          </a:xfrm>
+          <a:prstGeom prst="rect">
+            <a:avLst/>
+          </a:prstGeom>
+          <a:noFill/>
+          <a:ln w="9525">
+            <a:noFill/>
+            <a:headEnd/>
+            <a:tailEnd/>
+          </a:ln>
+        </p:spPr>
+      </p:pic>
+      <p:sp>
+        <p:nvSpPr>
+          <p:cNvPr id="1" name="TextBox 3"/>
+          <p:cNvSpPr txBox="1"/>
+          <p:nvPr/>
+        </p:nvSpPr>
+        <p:spPr>
+          <a:xfrm>
+            <a:off x="3568700" y="4076700"/>
+            <a:ext cx="5105400" cy="508000"/>
+          </a:xfrm>
+          <a:prstGeom prst="rect">
+            <a:avLst/>
+          </a:prstGeom>
+          <a:noFill/>
+        </p:spPr>
+        <p:txBody>
+          <a:bodyPr/>
+          <a:lstStyle/>
+          <a:p>
+            <a:pPr lvl="0" indent="0" marL="0" algn="ctr">
+              <a:buNone/>
+            </a:pPr>
+            <a:r>
+              <a:rPr/>
+              <a:t>Рисунок 10: Вопрос 9</a:t>
             </a:r>
           </a:p>
         </p:txBody>
@@ -4200,34 +4316,29 @@
             <p:ph type="title"/>
           </p:nvPr>
         </p:nvSpPr>
-        <p:spPr>
-          <a:xfrm>
-            <a:off x="457201" y="204787"/>
-            <a:ext cx="3008313" cy="871538"/>
-          </a:xfrm>
-        </p:spPr>
-        <p:txBody>
-          <a:bodyPr/>
-          <a:lstStyle/>
-          <a:p>
-            <a:pPr lvl="0" indent="0" marL="0">
-              <a:buNone/>
-            </a:pPr>
-            <a:r>
-              <a:rPr/>
-              <a:t>Вопрос 9. Update Manager</a:t>
-            </a:r>
-          </a:p>
-        </p:txBody>
-      </p:sp>
-      <p:sp>
-        <p:nvSpPr>
-          <p:cNvPr id="4" name="Text Placeholder 3"/>
-          <p:cNvSpPr>
-            <a:spLocks noGrp="1"/>
-          </p:cNvSpPr>
-          <p:nvPr>
-            <p:ph idx="2" sz="half" type="body"/>
+        <p:spPr/>
+        <p:txBody>
+          <a:bodyPr/>
+          <a:lstStyle/>
+          <a:p>
+            <a:pPr lvl="0" indent="0" marL="0">
+              <a:buNone/>
+            </a:pPr>
+            <a:r>
+              <a:rPr/>
+              <a:t>Вопрос 10. Синонимы командной строки</a:t>
+            </a:r>
+          </a:p>
+        </p:txBody>
+      </p:sp>
+      <p:sp>
+        <p:nvSpPr>
+          <p:cNvPr id="3" name="Content Placeholder 2"/>
+          <p:cNvSpPr>
+            <a:spLocks noGrp="1"/>
+          </p:cNvSpPr>
+          <p:nvPr>
+            <p:ph idx="1"/>
           </p:nvPr>
         </p:nvSpPr>
         <p:spPr/>
@@ -4244,76 +4355,20 @@
             </a:r>
             <a:r>
               <a:rPr/>
-              <a:t> - Обновление всей системы - Обновление программ</a:t>
-            </a:r>
-          </a:p>
-          <a:p>
-            <a:pPr lvl="0" indent="0" marL="0">
-              <a:buNone/>
-            </a:pPr>
-            <a:r>
-              <a:rPr/>
-              <a:t>Установкой и удалением не занимается.</a:t>
-            </a:r>
-          </a:p>
-        </p:txBody>
-      </p:sp>
-      <p:pic>
-        <p:nvPicPr>
-          <p:cNvPr descr="image/11.png" id="0" name="Picture 1"/>
-          <p:cNvPicPr>
-            <a:picLocks noGrp="1" noChangeAspect="1"/>
-          </p:cNvPicPr>
-          <p:nvPr/>
-        </p:nvPicPr>
-        <p:blipFill>
-          <a:blip r:embed="rId2"/>
-          <a:stretch>
-            <a:fillRect/>
-          </a:stretch>
-        </p:blipFill>
-        <p:spPr bwMode="auto">
-          <a:xfrm>
-            <a:off x="3568700" y="444500"/>
-            <a:ext cx="5105400" cy="3390900"/>
-          </a:xfrm>
-          <a:prstGeom prst="rect">
-            <a:avLst/>
-          </a:prstGeom>
-          <a:noFill/>
-          <a:ln w="9525">
-            <a:noFill/>
-            <a:headEnd/>
-            <a:tailEnd/>
-          </a:ln>
-        </p:spPr>
-      </p:pic>
-      <p:sp>
-        <p:nvSpPr>
-          <p:cNvPr id="1" name="TextBox 3"/>
-          <p:cNvSpPr txBox="1"/>
-          <p:nvPr/>
-        </p:nvSpPr>
-        <p:spPr>
-          <a:xfrm>
-            <a:off x="3568700" y="4076700"/>
-            <a:ext cx="5105400" cy="508000"/>
-          </a:xfrm>
-          <a:prstGeom prst="rect">
-            <a:avLst/>
-          </a:prstGeom>
-          <a:noFill/>
-        </p:spPr>
-        <p:txBody>
-          <a:bodyPr/>
-          <a:lstStyle/>
-          <a:p>
-            <a:pPr lvl="0" indent="0" marL="0" algn="ctr">
-              <a:buNone/>
-            </a:pPr>
-            <a:r>
-              <a:rPr/>
-              <a:t>Рисунок 11: Вопрос 9</a:t>
+              <a:t> Терминал, Консоль</a:t>
+            </a:r>
+          </a:p>
+          <a:p>
+            <a:pPr lvl="0" indent="0" marL="0">
+              <a:buNone/>
+            </a:pPr>
+            <a:r>
+              <a:rPr b="1"/>
+              <a:t>Пояснение:</a:t>
+            </a:r>
+            <a:r>
+              <a:rPr/>
+              <a:t> «Терминал» и «консоль» — это программные эмуляторы командной строки, они обозначают одно и то же.</a:t>
             </a:r>
           </a:p>
         </p:txBody>
@@ -4350,32 +4405,12 @@
             <p:ph type="title"/>
           </p:nvPr>
         </p:nvSpPr>
-        <p:spPr/>
-        <p:txBody>
-          <a:bodyPr/>
-          <a:lstStyle/>
-          <a:p>
-            <a:pPr lvl="0" indent="0" marL="0">
-              <a:buNone/>
-            </a:pPr>
-            <a:r>
-              <a:rPr/>
-              <a:t>Вопрос 10. Синонимы командной строки</a:t>
-            </a:r>
-          </a:p>
-        </p:txBody>
-      </p:sp>
-      <p:sp>
-        <p:nvSpPr>
-          <p:cNvPr id="3" name="Content Placeholder 2"/>
-          <p:cNvSpPr>
-            <a:spLocks noGrp="1"/>
-          </p:cNvSpPr>
-          <p:nvPr>
-            <p:ph idx="1"/>
-          </p:nvPr>
-        </p:nvSpPr>
-        <p:spPr/>
+        <p:spPr>
+          <a:xfrm>
+            <a:off x="722313" y="3305176"/>
+            <a:ext cx="7772400" cy="1021556"/>
+          </a:xfrm>
+        </p:spPr>
         <p:txBody>
           <a:bodyPr/>
           <a:lstStyle/>
@@ -4385,11 +4420,7 @@
             </a:pPr>
             <a:r>
               <a:rPr b="1"/>
-              <a:t>Ответ:</a:t>
-            </a:r>
-            <a:r>
-              <a:rPr/>
-              <a:t> Терминал, Консоль</a:t>
+              <a:t>Вопросы 11-13. Навигация и ls</a:t>
             </a:r>
           </a:p>
         </p:txBody>
@@ -4480,10 +4511,35 @@
         </p:nvSpPr>
         <p:spPr>
           <a:xfrm>
-            <a:off x="722313" y="3305176"/>
-            <a:ext cx="7772400" cy="1021556"/>
-          </a:xfrm>
-        </p:spPr>
+            <a:off x="457201" y="204787"/>
+            <a:ext cx="3008313" cy="871538"/>
+          </a:xfrm>
+        </p:spPr>
+        <p:txBody>
+          <a:bodyPr/>
+          <a:lstStyle/>
+          <a:p>
+            <a:pPr lvl="0" indent="0" marL="0">
+              <a:buNone/>
+            </a:pPr>
+            <a:r>
+              <a:rPr/>
+              <a:t>Вопрос 11. Команда для текущего каталога</a:t>
+            </a:r>
+          </a:p>
+        </p:txBody>
+      </p:sp>
+      <p:sp>
+        <p:nvSpPr>
+          <p:cNvPr id="4" name="Text Placeholder 3"/>
+          <p:cNvSpPr>
+            <a:spLocks noGrp="1"/>
+          </p:cNvSpPr>
+          <p:nvPr>
+            <p:ph idx="2" sz="half" type="body"/>
+          </p:nvPr>
+        </p:nvSpPr>
+        <p:spPr/>
         <p:txBody>
           <a:bodyPr/>
           <a:lstStyle/>
@@ -4493,7 +4549,84 @@
             </a:pPr>
             <a:r>
               <a:rPr b="1"/>
-              <a:t>Вопросы 11-13. Навигация и ls</a:t>
+              <a:t>Ответ:</a:t>
+            </a:r>
+            <a:r>
+              <a:rPr/>
+              <a:t> pwd</a:t>
+            </a:r>
+          </a:p>
+          <a:p>
+            <a:pPr lvl="0" indent="0" marL="0">
+              <a:buNone/>
+            </a:pPr>
+            <a:r>
+              <a:rPr b="1"/>
+              <a:t>Пояснение:</a:t>
+            </a:r>
+            <a:r>
+              <a:rPr/>
+              <a:t> pwd (print working directory) выводит полный путь к текущему каталогу. Другие варианты не работают.</a:t>
+            </a:r>
+          </a:p>
+        </p:txBody>
+      </p:sp>
+      <p:pic>
+        <p:nvPicPr>
+          <p:cNvPr descr="image/13.png" id="0" name="Picture 1"/>
+          <p:cNvPicPr>
+            <a:picLocks noGrp="1" noChangeAspect="1"/>
+          </p:cNvPicPr>
+          <p:nvPr/>
+        </p:nvPicPr>
+        <p:blipFill>
+          <a:blip r:embed="rId2"/>
+          <a:stretch>
+            <a:fillRect/>
+          </a:stretch>
+        </p:blipFill>
+        <p:spPr bwMode="auto">
+          <a:xfrm>
+            <a:off x="3568700" y="444500"/>
+            <a:ext cx="5105400" cy="3390900"/>
+          </a:xfrm>
+          <a:prstGeom prst="rect">
+            <a:avLst/>
+          </a:prstGeom>
+          <a:noFill/>
+          <a:ln w="9525">
+            <a:noFill/>
+            <a:headEnd/>
+            <a:tailEnd/>
+          </a:ln>
+        </p:spPr>
+      </p:pic>
+      <p:sp>
+        <p:nvSpPr>
+          <p:cNvPr id="1" name="TextBox 3"/>
+          <p:cNvSpPr txBox="1"/>
+          <p:nvPr/>
+        </p:nvSpPr>
+        <p:spPr>
+          <a:xfrm>
+            <a:off x="3568700" y="4076700"/>
+            <a:ext cx="5105400" cy="508000"/>
+          </a:xfrm>
+          <a:prstGeom prst="rect">
+            <a:avLst/>
+          </a:prstGeom>
+          <a:noFill/>
+        </p:spPr>
+        <p:txBody>
+          <a:bodyPr/>
+          <a:lstStyle/>
+          <a:p>
+            <a:pPr lvl="0" indent="0" marL="0" algn="ctr">
+              <a:buNone/>
+            </a:pPr>
+            <a:r>
+              <a:rPr/>
+              <a:t>Рисунок 11: Вопрос 11</a:t>
             </a:r>
           </a:p>
         </p:txBody>
@@ -4545,7 +4678,7 @@
             </a:pPr>
             <a:r>
               <a:rPr/>
-              <a:t>Вопрос 11. Команда для текущего каталога</a:t>
+              <a:t>Вопрос 12. Эквивалентные команды ls</a:t>
             </a:r>
           </a:p>
         </p:txBody>
@@ -4574,23 +4707,27 @@
             </a:r>
             <a:r>
               <a:rPr/>
-              <a:t> pwd</a:t>
-            </a:r>
-          </a:p>
-          <a:p>
-            <a:pPr lvl="0" indent="0" marL="0">
-              <a:buNone/>
-            </a:pPr>
-            <a:r>
-              <a:rPr/>
-              <a:t>print working directory — показывает путь.</a:t>
+              <a:t> - ls -lAh /some/directory - ls –human-readable -A -l /some/directory - ls –almost-all –human-readable -l /some/directory</a:t>
+            </a:r>
+          </a:p>
+          <a:p>
+            <a:pPr lvl="0" indent="0" marL="0">
+              <a:buNone/>
+            </a:pPr>
+            <a:r>
+              <a:rPr b="1"/>
+              <a:t>Пояснение:</a:t>
+            </a:r>
+            <a:r>
+              <a:rPr/>
+              <a:t> У всех этих команд одни и те же опции: -A (почти всё, кроме . и ..), -l (подробно), -h (размеры в удобном виде). Порядок опций не важен.</a:t>
             </a:r>
           </a:p>
         </p:txBody>
       </p:sp>
       <p:pic>
         <p:nvPicPr>
-          <p:cNvPr descr="image/13.png" id="0" name="Picture 1"/>
+          <p:cNvPr descr="image/14.png" id="0" name="Picture 1"/>
           <p:cNvPicPr>
             <a:picLocks noGrp="1" noChangeAspect="1"/>
           </p:cNvPicPr>
@@ -4604,8 +4741,8 @@
         </p:blipFill>
         <p:spPr bwMode="auto">
           <a:xfrm>
-            <a:off x="3568700" y="444500"/>
-            <a:ext cx="5105400" cy="3390900"/>
+            <a:off x="3568700" y="368300"/>
+            <a:ext cx="5105400" cy="3543300"/>
           </a:xfrm>
           <a:prstGeom prst="rect">
             <a:avLst/>
@@ -4643,7 +4780,7 @@
             </a:pPr>
             <a:r>
               <a:rPr/>
-              <a:t>Рисунок 12: Вопрос 11</a:t>
+              <a:t>Рисунок 12: Вопрос 12</a:t>
             </a:r>
           </a:p>
         </p:txBody>
@@ -4695,7 +4832,7 @@
             </a:pPr>
             <a:r>
               <a:rPr/>
-              <a:t>Вопрос 12. Эквивалентные команды ls</a:t>
+              <a:t>Вопрос 13. Показать Downloads из Documents</a:t>
             </a:r>
           </a:p>
         </p:txBody>
@@ -4724,23 +4861,27 @@
             </a:r>
             <a:r>
               <a:rPr/>
-              <a:t> - ls -lAh /some/directory - ls –human-readable -A -l /some/directory - ls –almost-all –human-readable -l /some/directory</a:t>
-            </a:r>
-          </a:p>
-          <a:p>
-            <a:pPr lvl="0" indent="0" marL="0">
-              <a:buNone/>
-            </a:pPr>
-            <a:r>
-              <a:rPr/>
-              <a:t>Опции -A -l -h</a:t>
+              <a:t> - ls /home/bi/Downloads - ls ~/Downloads</a:t>
+            </a:r>
+          </a:p>
+          <a:p>
+            <a:pPr lvl="0" indent="0" marL="0">
+              <a:buNone/>
+            </a:pPr>
+            <a:r>
+              <a:rPr b="1"/>
+              <a:t>Пояснение:</a:t>
+            </a:r>
+            <a:r>
+              <a:rPr/>
+              <a:t> Тильда (~) заменяет путь к домашней папке. Оба варианта ведут в одно место.</a:t>
             </a:r>
           </a:p>
         </p:txBody>
       </p:sp>
       <p:pic>
         <p:nvPicPr>
-          <p:cNvPr descr="image/14.png" id="0" name="Picture 1"/>
+          <p:cNvPr descr="image/15.png" id="0" name="Picture 1"/>
           <p:cNvPicPr>
             <a:picLocks noGrp="1" noChangeAspect="1"/>
           </p:cNvPicPr>
@@ -4754,8 +4895,8 @@
         </p:blipFill>
         <p:spPr bwMode="auto">
           <a:xfrm>
-            <a:off x="3568700" y="368300"/>
-            <a:ext cx="5105400" cy="3543300"/>
+            <a:off x="3568700" y="241300"/>
+            <a:ext cx="5105400" cy="3810000"/>
           </a:xfrm>
           <a:prstGeom prst="rect">
             <a:avLst/>
@@ -4793,7 +4934,7 @@
             </a:pPr>
             <a:r>
               <a:rPr/>
-              <a:t>Рисунок 13: Вопрос 12</a:t>
+              <a:t>Рисунок 13: Вопрос 13</a:t>
             </a:r>
           </a:p>
         </p:txBody>
@@ -4832,35 +4973,10 @@
         </p:nvSpPr>
         <p:spPr>
           <a:xfrm>
-            <a:off x="457201" y="204787"/>
-            <a:ext cx="3008313" cy="871538"/>
-          </a:xfrm>
-        </p:spPr>
-        <p:txBody>
-          <a:bodyPr/>
-          <a:lstStyle/>
-          <a:p>
-            <a:pPr lvl="0" indent="0" marL="0">
-              <a:buNone/>
-            </a:pPr>
-            <a:r>
-              <a:rPr/>
-              <a:t>Вопрос 13. Показать Downloads из Documents</a:t>
-            </a:r>
-          </a:p>
-        </p:txBody>
-      </p:sp>
-      <p:sp>
-        <p:nvSpPr>
-          <p:cNvPr id="4" name="Text Placeholder 3"/>
-          <p:cNvSpPr>
-            <a:spLocks noGrp="1"/>
-          </p:cNvSpPr>
-          <p:nvPr>
-            <p:ph idx="2" sz="half" type="body"/>
-          </p:nvPr>
-        </p:nvSpPr>
-        <p:spPr/>
+            <a:off x="722313" y="3305176"/>
+            <a:ext cx="7772400" cy="1021556"/>
+          </a:xfrm>
+        </p:spPr>
         <p:txBody>
           <a:bodyPr/>
           <a:lstStyle/>
@@ -4870,80 +4986,7 @@
             </a:pPr>
             <a:r>
               <a:rPr b="1"/>
-              <a:t>Ответ:</a:t>
-            </a:r>
-            <a:r>
-              <a:rPr/>
-              <a:t> - ls /home/bi/Downloads - ls ~/Downloads</a:t>
-            </a:r>
-          </a:p>
-          <a:p>
-            <a:pPr lvl="0" indent="0" marL="0">
-              <a:buNone/>
-            </a:pPr>
-            <a:r>
-              <a:rPr/>
-              <a:t>Тильда — домашняя папка.</a:t>
-            </a:r>
-          </a:p>
-        </p:txBody>
-      </p:sp>
-      <p:pic>
-        <p:nvPicPr>
-          <p:cNvPr descr="image/15.png" id="0" name="Picture 1"/>
-          <p:cNvPicPr>
-            <a:picLocks noGrp="1" noChangeAspect="1"/>
-          </p:cNvPicPr>
-          <p:nvPr/>
-        </p:nvPicPr>
-        <p:blipFill>
-          <a:blip r:embed="rId2"/>
-          <a:stretch>
-            <a:fillRect/>
-          </a:stretch>
-        </p:blipFill>
-        <p:spPr bwMode="auto">
-          <a:xfrm>
-            <a:off x="3568700" y="241300"/>
-            <a:ext cx="5105400" cy="3810000"/>
-          </a:xfrm>
-          <a:prstGeom prst="rect">
-            <a:avLst/>
-          </a:prstGeom>
-          <a:noFill/>
-          <a:ln w="9525">
-            <a:noFill/>
-            <a:headEnd/>
-            <a:tailEnd/>
-          </a:ln>
-        </p:spPr>
-      </p:pic>
-      <p:sp>
-        <p:nvSpPr>
-          <p:cNvPr id="1" name="TextBox 3"/>
-          <p:cNvSpPr txBox="1"/>
-          <p:nvPr/>
-        </p:nvSpPr>
-        <p:spPr>
-          <a:xfrm>
-            <a:off x="3568700" y="4076700"/>
-            <a:ext cx="5105400" cy="508000"/>
-          </a:xfrm>
-          <a:prstGeom prst="rect">
-            <a:avLst/>
-          </a:prstGeom>
-          <a:noFill/>
-        </p:spPr>
-        <p:txBody>
-          <a:bodyPr/>
-          <a:lstStyle/>
-          <a:p>
-            <a:pPr lvl="0" indent="0" marL="0" algn="ctr">
-              <a:buNone/>
-            </a:pPr>
-            <a:r>
-              <a:rPr/>
-              <a:t>Рисунок 14: Вопрос 13</a:t>
+              <a:t>Вопросы 14-18. Процессы и управление</a:t>
             </a:r>
           </a:p>
         </p:txBody>
@@ -4982,10 +5025,35 @@
         </p:nvSpPr>
         <p:spPr>
           <a:xfrm>
-            <a:off x="722313" y="3305176"/>
-            <a:ext cx="7772400" cy="1021556"/>
-          </a:xfrm>
-        </p:spPr>
+            <a:off x="457201" y="204787"/>
+            <a:ext cx="3008313" cy="871538"/>
+          </a:xfrm>
+        </p:spPr>
+        <p:txBody>
+          <a:bodyPr/>
+          <a:lstStyle/>
+          <a:p>
+            <a:pPr lvl="0" indent="0" marL="0">
+              <a:buNone/>
+            </a:pPr>
+            <a:r>
+              <a:rPr/>
+              <a:t>Вопрос 14. Удаление директорий</a:t>
+            </a:r>
+          </a:p>
+        </p:txBody>
+      </p:sp>
+      <p:sp>
+        <p:nvSpPr>
+          <p:cNvPr id="4" name="Text Placeholder 3"/>
+          <p:cNvSpPr>
+            <a:spLocks noGrp="1"/>
+          </p:cNvSpPr>
+          <p:nvPr>
+            <p:ph idx="2" sz="half" type="body"/>
+          </p:nvPr>
+        </p:nvSpPr>
+        <p:spPr/>
         <p:txBody>
           <a:bodyPr/>
           <a:lstStyle/>
@@ -4995,7 +5063,84 @@
             </a:pPr>
             <a:r>
               <a:rPr b="1"/>
-              <a:t>Вопросы 14-18. Процессы и управление</a:t>
+              <a:t>Ответ:</a:t>
+            </a:r>
+            <a:r>
+              <a:rPr/>
+              <a:t> rm -r</a:t>
+            </a:r>
+          </a:p>
+          <a:p>
+            <a:pPr lvl="0" indent="0" marL="0">
+              <a:buNone/>
+            </a:pPr>
+            <a:r>
+              <a:rPr b="1"/>
+              <a:t>Пояснение:</a:t>
+            </a:r>
+            <a:r>
+              <a:rPr/>
+              <a:t> Опция -r (recursive) позволяет удалять каталоги вместе со всем содержимым. Без неё rm удаляет только файлы.</a:t>
+            </a:r>
+          </a:p>
+        </p:txBody>
+      </p:sp>
+      <p:pic>
+        <p:nvPicPr>
+          <p:cNvPr descr="image/16.png" id="0" name="Picture 1"/>
+          <p:cNvPicPr>
+            <a:picLocks noGrp="1" noChangeAspect="1"/>
+          </p:cNvPicPr>
+          <p:nvPr/>
+        </p:nvPicPr>
+        <p:blipFill>
+          <a:blip r:embed="rId2"/>
+          <a:stretch>
+            <a:fillRect/>
+          </a:stretch>
+        </p:blipFill>
+        <p:spPr bwMode="auto">
+          <a:xfrm>
+            <a:off x="3568700" y="698500"/>
+            <a:ext cx="5105400" cy="2870200"/>
+          </a:xfrm>
+          <a:prstGeom prst="rect">
+            <a:avLst/>
+          </a:prstGeom>
+          <a:noFill/>
+          <a:ln w="9525">
+            <a:noFill/>
+            <a:headEnd/>
+            <a:tailEnd/>
+          </a:ln>
+        </p:spPr>
+      </p:pic>
+      <p:sp>
+        <p:nvSpPr>
+          <p:cNvPr id="1" name="TextBox 3"/>
+          <p:cNvSpPr txBox="1"/>
+          <p:nvPr/>
+        </p:nvSpPr>
+        <p:spPr>
+          <a:xfrm>
+            <a:off x="3568700" y="4076700"/>
+            <a:ext cx="5105400" cy="508000"/>
+          </a:xfrm>
+          <a:prstGeom prst="rect">
+            <a:avLst/>
+          </a:prstGeom>
+          <a:noFill/>
+        </p:spPr>
+        <p:txBody>
+          <a:bodyPr/>
+          <a:lstStyle/>
+          <a:p>
+            <a:pPr lvl="0" indent="0" marL="0" algn="ctr">
+              <a:buNone/>
+            </a:pPr>
+            <a:r>
+              <a:rPr/>
+              <a:t>Рисунок 14: Вопрос 14</a:t>
             </a:r>
           </a:p>
         </p:txBody>
@@ -5047,7 +5192,7 @@
             </a:pPr>
             <a:r>
               <a:rPr/>
-              <a:t>Вопрос 14. Удаление директорий</a:t>
+              <a:t>Вопрос 15. Firefox и exit</a:t>
             </a:r>
           </a:p>
         </p:txBody>
@@ -5076,23 +5221,27 @@
             </a:r>
             <a:r>
               <a:rPr/>
-              <a:t> rm -r</a:t>
-            </a:r>
-          </a:p>
-          <a:p>
-            <a:pPr lvl="0" indent="0" marL="0">
-              <a:buNone/>
-            </a:pPr>
-            <a:r>
-              <a:rPr/>
-              <a:t>-r нужна для удаления папок с содержимым.</a:t>
+              <a:t> Терминал закроется, Firefox останется</a:t>
+            </a:r>
+          </a:p>
+          <a:p>
+            <a:pPr lvl="0" indent="0" marL="0">
+              <a:buNone/>
+            </a:pPr>
+            <a:r>
+              <a:rPr b="1"/>
+              <a:t>Пояснение:</a:t>
+            </a:r>
+            <a:r>
+              <a:rPr/>
+              <a:t> Firefox был запущен из терминала, но не завершился при вводе exit. Завершился только терминал, а браузер продолжает работать.</a:t>
             </a:r>
           </a:p>
         </p:txBody>
       </p:sp>
       <p:pic>
         <p:nvPicPr>
-          <p:cNvPr descr="image/16.png" id="0" name="Picture 1"/>
+          <p:cNvPr descr="image/17.png" id="0" name="Picture 1"/>
           <p:cNvPicPr>
             <a:picLocks noGrp="1" noChangeAspect="1"/>
           </p:cNvPicPr>
@@ -5106,8 +5255,8 @@
         </p:blipFill>
         <p:spPr bwMode="auto">
           <a:xfrm>
-            <a:off x="3568700" y="698500"/>
-            <a:ext cx="5105400" cy="2870200"/>
+            <a:off x="3568700" y="1054100"/>
+            <a:ext cx="5105400" cy="2171700"/>
           </a:xfrm>
           <a:prstGeom prst="rect">
             <a:avLst/>
@@ -5145,7 +5294,7 @@
             </a:pPr>
             <a:r>
               <a:rPr/>
-              <a:t>Рисунок 15: Вопрос 14</a:t>
+              <a:t>Рисунок 15: Вопрос 15</a:t>
             </a:r>
           </a:p>
         </p:txBody>
@@ -5197,7 +5346,7 @@
             </a:pPr>
             <a:r>
               <a:rPr/>
-              <a:t>Вопрос 15. Firefox и exit</a:t>
+              <a:t>Вопрос 16. Что делает &amp;</a:t>
             </a:r>
           </a:p>
         </p:txBody>
@@ -5226,14 +5375,27 @@
             </a:r>
             <a:r>
               <a:rPr/>
-              <a:t> Терминал закроется, Firefox останется</a:t>
+              <a:t> Запуск, Ctrl+Z, bg</a:t>
+            </a:r>
+          </a:p>
+          <a:p>
+            <a:pPr lvl="0" indent="0" marL="0">
+              <a:buNone/>
+            </a:pPr>
+            <a:r>
+              <a:rPr b="1"/>
+              <a:t>Пояснение:</a:t>
+            </a:r>
+            <a:r>
+              <a:rPr/>
+              <a:t> &amp; сразу запускает программу в фоновом режиме. Вручную это делается так: запуск, затем приостановка (Ctrl+Z) и перевод в фон (bg).</a:t>
             </a:r>
           </a:p>
         </p:txBody>
       </p:sp>
       <p:pic>
         <p:nvPicPr>
-          <p:cNvPr descr="image/17.png" id="0" name="Picture 1"/>
+          <p:cNvPr descr="image/18.png" id="0" name="Picture 1"/>
           <p:cNvPicPr>
             <a:picLocks noGrp="1" noChangeAspect="1"/>
           </p:cNvPicPr>
@@ -5247,8 +5409,8 @@
         </p:blipFill>
         <p:spPr bwMode="auto">
           <a:xfrm>
-            <a:off x="3568700" y="1054100"/>
-            <a:ext cx="5105400" cy="2171700"/>
+            <a:off x="3568700" y="444500"/>
+            <a:ext cx="5105400" cy="3390900"/>
           </a:xfrm>
           <a:prstGeom prst="rect">
             <a:avLst/>
@@ -5286,7 +5448,7 @@
             </a:pPr>
             <a:r>
               <a:rPr/>
-              <a:t>Рисунок 16: Вопрос 15</a:t>
+              <a:t>Рисунок 16: Вопрос 16</a:t>
             </a:r>
           </a:p>
         </p:txBody>
@@ -5338,7 +5500,7 @@
             </a:pPr>
             <a:r>
               <a:rPr/>
-              <a:t>Вопрос 16. Что делает &amp;</a:t>
+              <a:t>Вопрос 17. Запуск программы из файла</a:t>
             </a:r>
           </a:p>
         </p:txBody>
@@ -5367,23 +5529,27 @@
             </a:r>
             <a:r>
               <a:rPr/>
-              <a:t> Запуск, Ctrl+Z, bg</a:t>
-            </a:r>
-          </a:p>
-          <a:p>
-            <a:pPr lvl="0" indent="0" marL="0">
-              <a:buNone/>
-            </a:pPr>
-            <a:r>
-              <a:rPr/>
-              <a:t>&amp; — сразу в фон.</a:t>
+              <a:t> 2026-05-15 21:38:39 Control sum: 957</a:t>
+            </a:r>
+          </a:p>
+          <a:p>
+            <a:pPr lvl="0" indent="0" marL="0">
+              <a:buNone/>
+            </a:pPr>
+            <a:r>
+              <a:rPr b="1"/>
+              <a:t>Пояснение:</a:t>
+            </a:r>
+            <a:r>
+              <a:rPr/>
+              <a:t> Файл скачан, сделан исполняемым (chmod +x), запущен. Программа выдала текущую дату и контрольную сумму.</a:t>
             </a:r>
           </a:p>
         </p:txBody>
       </p:sp>
       <p:pic>
         <p:nvPicPr>
-          <p:cNvPr descr="image/18.png" id="0" name="Picture 1"/>
+          <p:cNvPr descr="image/19.png" id="0" name="Picture 1"/>
           <p:cNvPicPr>
             <a:picLocks noGrp="1" noChangeAspect="1"/>
           </p:cNvPicPr>
@@ -5397,8 +5563,8 @@
         </p:blipFill>
         <p:spPr bwMode="auto">
           <a:xfrm>
-            <a:off x="3568700" y="444500"/>
-            <a:ext cx="5105400" cy="3390900"/>
+            <a:off x="3568700" y="1092200"/>
+            <a:ext cx="5105400" cy="2095500"/>
           </a:xfrm>
           <a:prstGeom prst="rect">
             <a:avLst/>
@@ -5436,7 +5602,7 @@
             </a:pPr>
             <a:r>
               <a:rPr/>
-              <a:t>Рисунок 17: Вопрос 16</a:t>
+              <a:t>Рисунок 17: Вопрос 17</a:t>
             </a:r>
           </a:p>
         </p:txBody>
@@ -5488,7 +5654,7 @@
             </a:pPr>
             <a:r>
               <a:rPr/>
-              <a:t>Вопрос 17. Запуск программы из файла</a:t>
+              <a:t>Вопрос 18. Куда выводится stderr</a:t>
             </a:r>
           </a:p>
         </p:txBody>
@@ -5517,14 +5683,27 @@
             </a:r>
             <a:r>
               <a:rPr/>
-              <a:t> 2026-05-15 21:38:39 Control sum: 957</a:t>
+              <a:t> На экран</a:t>
+            </a:r>
+          </a:p>
+          <a:p>
+            <a:pPr lvl="0" indent="0" marL="0">
+              <a:buNone/>
+            </a:pPr>
+            <a:r>
+              <a:rPr b="1"/>
+              <a:t>Пояснение:</a:t>
+            </a:r>
+            <a:r>
+              <a:rPr/>
+              <a:t> По умолчанию стандартный поток ошибок (stderr) выводится на экран, как и стандартный вывод (stdout).</a:t>
             </a:r>
           </a:p>
         </p:txBody>
       </p:sp>
       <p:pic>
         <p:nvPicPr>
-          <p:cNvPr descr="image/19.png" id="0" name="Picture 1"/>
+          <p:cNvPr descr="image/20.png" id="0" name="Picture 1"/>
           <p:cNvPicPr>
             <a:picLocks noGrp="1" noChangeAspect="1"/>
           </p:cNvPicPr>
@@ -5538,8 +5717,8 @@
         </p:blipFill>
         <p:spPr bwMode="auto">
           <a:xfrm>
-            <a:off x="3568700" y="1092200"/>
-            <a:ext cx="5105400" cy="2095500"/>
+            <a:off x="3683000" y="203200"/>
+            <a:ext cx="4876800" cy="3873500"/>
           </a:xfrm>
           <a:prstGeom prst="rect">
             <a:avLst/>
@@ -5577,7 +5756,7 @@
             </a:pPr>
             <a:r>
               <a:rPr/>
-              <a:t>Рисунок 18: Вопрос 17</a:t>
+              <a:t>Рисунок 18: Вопрос 18</a:t>
             </a:r>
           </a:p>
         </p:txBody>
@@ -5606,7 +5785,7 @@
       </p:grpSpPr>
       <p:pic>
         <p:nvPicPr>
-          <p:cNvPr descr="image/20.png" id="0" name="Picture 1"/>
+          <p:cNvPr descr="image/21.png" id="0" name="Picture 1"/>
           <p:cNvPicPr>
             <a:picLocks noGrp="1" noChangeAspect="1"/>
           </p:cNvPicPr>
@@ -5620,8 +5799,8 @@
         </p:blipFill>
         <p:spPr bwMode="auto">
           <a:xfrm>
-            <a:off x="2755900" y="1193800"/>
-            <a:ext cx="3632200" cy="2882900"/>
+            <a:off x="2032000" y="1193800"/>
+            <a:ext cx="5092700" cy="2882900"/>
           </a:xfrm>
           <a:prstGeom prst="rect">
             <a:avLst/>
@@ -5659,7 +5838,7 @@
             </a:pPr>
             <a:r>
               <a:rPr/>
-              <a:t>Рисунок 19: Вопрос 17 продолжение</a:t>
+              <a:t>Рисунок 19: Вопрос 18</a:t>
             </a:r>
           </a:p>
         </p:txBody>
@@ -5796,35 +5975,10 @@
         </p:nvSpPr>
         <p:spPr>
           <a:xfrm>
-            <a:off x="457201" y="204787"/>
-            <a:ext cx="3008313" cy="871538"/>
-          </a:xfrm>
-        </p:spPr>
-        <p:txBody>
-          <a:bodyPr/>
-          <a:lstStyle/>
-          <a:p>
-            <a:pPr lvl="0" indent="0" marL="0">
-              <a:buNone/>
-            </a:pPr>
-            <a:r>
-              <a:rPr/>
-              <a:t>Вопрос 18. Куда выводится stderr</a:t>
-            </a:r>
-          </a:p>
-        </p:txBody>
-      </p:sp>
-      <p:sp>
-        <p:nvSpPr>
-          <p:cNvPr id="4" name="Text Placeholder 3"/>
-          <p:cNvSpPr>
-            <a:spLocks noGrp="1"/>
-          </p:cNvSpPr>
-          <p:nvPr>
-            <p:ph idx="2" sz="half" type="body"/>
-          </p:nvPr>
-        </p:nvSpPr>
-        <p:spPr/>
+            <a:off x="722313" y="3305176"/>
+            <a:ext cx="7772400" cy="1021556"/>
+          </a:xfrm>
+        </p:spPr>
         <p:txBody>
           <a:bodyPr/>
           <a:lstStyle/>
@@ -5834,80 +5988,7 @@
             </a:pPr>
             <a:r>
               <a:rPr b="1"/>
-              <a:t>Ответ:</a:t>
-            </a:r>
-            <a:r>
-              <a:rPr/>
-              <a:t> На экран</a:t>
-            </a:r>
-          </a:p>
-          <a:p>
-            <a:pPr lvl="0" indent="0" marL="0">
-              <a:buNone/>
-            </a:pPr>
-            <a:r>
-              <a:rPr/>
-              <a:t>stderr по умолчанию на экран, как и stdout.</a:t>
-            </a:r>
-          </a:p>
-        </p:txBody>
-      </p:sp>
-      <p:pic>
-        <p:nvPicPr>
-          <p:cNvPr descr="image/21.png" id="0" name="Picture 1"/>
-          <p:cNvPicPr>
-            <a:picLocks noGrp="1" noChangeAspect="1"/>
-          </p:cNvPicPr>
-          <p:nvPr/>
-        </p:nvPicPr>
-        <p:blipFill>
-          <a:blip r:embed="rId2"/>
-          <a:stretch>
-            <a:fillRect/>
-          </a:stretch>
-        </p:blipFill>
-        <p:spPr bwMode="auto">
-          <a:xfrm>
-            <a:off x="3568700" y="698500"/>
-            <a:ext cx="5105400" cy="2895600"/>
-          </a:xfrm>
-          <a:prstGeom prst="rect">
-            <a:avLst/>
-          </a:prstGeom>
-          <a:noFill/>
-          <a:ln w="9525">
-            <a:noFill/>
-            <a:headEnd/>
-            <a:tailEnd/>
-          </a:ln>
-        </p:spPr>
-      </p:pic>
-      <p:sp>
-        <p:nvSpPr>
-          <p:cNvPr id="1" name="TextBox 3"/>
-          <p:cNvSpPr txBox="1"/>
-          <p:nvPr/>
-        </p:nvSpPr>
-        <p:spPr>
-          <a:xfrm>
-            <a:off x="3568700" y="4076700"/>
-            <a:ext cx="5105400" cy="508000"/>
-          </a:xfrm>
-          <a:prstGeom prst="rect">
-            <a:avLst/>
-          </a:prstGeom>
-          <a:noFill/>
-        </p:spPr>
-        <p:txBody>
-          <a:bodyPr/>
-          <a:lstStyle/>
-          <a:p>
-            <a:pPr lvl="0" indent="0" marL="0" algn="ctr">
-              <a:buNone/>
-            </a:pPr>
-            <a:r>
-              <a:rPr/>
-              <a:t>Рисунок 20: Вопрос 18</a:t>
+              <a:t>Вопросы 19-21. Перенаправление и wget</a:t>
             </a:r>
           </a:p>
         </p:txBody>
@@ -5946,10 +6027,35 @@
         </p:nvSpPr>
         <p:spPr>
           <a:xfrm>
-            <a:off x="722313" y="3305176"/>
-            <a:ext cx="7772400" cy="1021556"/>
-          </a:xfrm>
-        </p:spPr>
+            <a:off x="457201" y="204787"/>
+            <a:ext cx="3008313" cy="871538"/>
+          </a:xfrm>
+        </p:spPr>
+        <p:txBody>
+          <a:bodyPr/>
+          <a:lstStyle/>
+          <a:p>
+            <a:pPr lvl="0" indent="0" marL="0">
+              <a:buNone/>
+            </a:pPr>
+            <a:r>
+              <a:rPr/>
+              <a:t>Вопрос 19. Записать ошибки в файл</a:t>
+            </a:r>
+          </a:p>
+        </p:txBody>
+      </p:sp>
+      <p:sp>
+        <p:nvSpPr>
+          <p:cNvPr id="4" name="Text Placeholder 3"/>
+          <p:cNvSpPr>
+            <a:spLocks noGrp="1"/>
+          </p:cNvSpPr>
+          <p:nvPr>
+            <p:ph idx="2" sz="half" type="body"/>
+          </p:nvPr>
+        </p:nvSpPr>
+        <p:spPr/>
         <p:txBody>
           <a:bodyPr/>
           <a:lstStyle/>
@@ -5959,7 +6065,84 @@
             </a:pPr>
             <a:r>
               <a:rPr b="1"/>
-              <a:t>Вопросы 19-21. Перенаправление и wget</a:t>
+              <a:t>Ответ:</a:t>
+            </a:r>
+            <a:r>
+              <a:rPr/>
+              <a:t> - program 2&gt; file.txt - program 2&gt;&gt; file.txt</a:t>
+            </a:r>
+          </a:p>
+          <a:p>
+            <a:pPr lvl="0" indent="0" marL="0">
+              <a:buNone/>
+            </a:pPr>
+            <a:r>
+              <a:rPr b="1"/>
+              <a:t>Пояснение:</a:t>
+            </a:r>
+            <a:r>
+              <a:rPr/>
+              <a:t> 2&gt; перенаправляет поток ошибок в файл (перезапись), 2&gt;&gt; — добавление в конец. Другие варианты либо неверны, либо перенаправляют stdout.</a:t>
+            </a:r>
+          </a:p>
+        </p:txBody>
+      </p:sp>
+      <p:pic>
+        <p:nvPicPr>
+          <p:cNvPr descr="image/22.png" id="0" name="Picture 1"/>
+          <p:cNvPicPr>
+            <a:picLocks noGrp="1" noChangeAspect="1"/>
+          </p:cNvPicPr>
+          <p:nvPr/>
+        </p:nvPicPr>
+        <p:blipFill>
+          <a:blip r:embed="rId2"/>
+          <a:stretch>
+            <a:fillRect/>
+          </a:stretch>
+        </p:blipFill>
+        <p:spPr bwMode="auto">
+          <a:xfrm>
+            <a:off x="3568700" y="825500"/>
+            <a:ext cx="5105400" cy="2616200"/>
+          </a:xfrm>
+          <a:prstGeom prst="rect">
+            <a:avLst/>
+          </a:prstGeom>
+          <a:noFill/>
+          <a:ln w="9525">
+            <a:noFill/>
+            <a:headEnd/>
+            <a:tailEnd/>
+          </a:ln>
+        </p:spPr>
+      </p:pic>
+      <p:sp>
+        <p:nvSpPr>
+          <p:cNvPr id="1" name="TextBox 3"/>
+          <p:cNvSpPr txBox="1"/>
+          <p:nvPr/>
+        </p:nvSpPr>
+        <p:spPr>
+          <a:xfrm>
+            <a:off x="3568700" y="4076700"/>
+            <a:ext cx="5105400" cy="508000"/>
+          </a:xfrm>
+          <a:prstGeom prst="rect">
+            <a:avLst/>
+          </a:prstGeom>
+          <a:noFill/>
+        </p:spPr>
+        <p:txBody>
+          <a:bodyPr/>
+          <a:lstStyle/>
+          <a:p>
+            <a:pPr lvl="0" indent="0" marL="0" algn="ctr">
+              <a:buNone/>
+            </a:pPr>
+            <a:r>
+              <a:rPr/>
+              <a:t>Рисунок 20: Вопрос 19</a:t>
             </a:r>
           </a:p>
         </p:txBody>
@@ -6011,7 +6194,7 @@
             </a:pPr>
             <a:r>
               <a:rPr/>
-              <a:t>Вопрос 19. Записать ошибки в файл</a:t>
+              <a:t>Вопрос 20. Ошибки в конвейере</a:t>
             </a:r>
           </a:p>
         </p:txBody>
@@ -6040,23 +6223,27 @@
             </a:r>
             <a:r>
               <a:rPr/>
-              <a:t> - program 2&gt; file.txt - program 2&gt;&gt; file.txt</a:t>
-            </a:r>
-          </a:p>
-          <a:p>
-            <a:pPr lvl="0" indent="0" marL="0">
-              <a:buNone/>
-            </a:pPr>
-            <a:r>
-              <a:rPr/>
-              <a:t>2&gt; — перезапись, 2&gt;&gt; — добавление.</a:t>
+              <a:t> Выводятся на экран</a:t>
+            </a:r>
+          </a:p>
+          <a:p>
+            <a:pPr lvl="0" indent="0" marL="0">
+              <a:buNone/>
+            </a:pPr>
+            <a:r>
+              <a:rPr b="1"/>
+              <a:t>Пояснение:</a:t>
+            </a:r>
+            <a:r>
+              <a:rPr/>
+              <a:t> По конвейеру (pipe) передаётся только stdout, а stderr по умолчанию идёт на экран.</a:t>
             </a:r>
           </a:p>
         </p:txBody>
       </p:sp>
       <p:pic>
         <p:nvPicPr>
-          <p:cNvPr descr="image/22.png" id="0" name="Picture 1"/>
+          <p:cNvPr descr="image/23.png" id="0" name="Picture 1"/>
           <p:cNvPicPr>
             <a:picLocks noGrp="1" noChangeAspect="1"/>
           </p:cNvPicPr>
@@ -6070,8 +6257,8 @@
         </p:blipFill>
         <p:spPr bwMode="auto">
           <a:xfrm>
-            <a:off x="3568700" y="825500"/>
-            <a:ext cx="5105400" cy="2616200"/>
+            <a:off x="3568700" y="939800"/>
+            <a:ext cx="5105400" cy="2400300"/>
           </a:xfrm>
           <a:prstGeom prst="rect">
             <a:avLst/>
@@ -6109,7 +6296,7 @@
             </a:pPr>
             <a:r>
               <a:rPr/>
-              <a:t>Рисунок 21: Вопрос 19</a:t>
+              <a:t>Рисунок 21: Вопрос 20</a:t>
             </a:r>
           </a:p>
         </p:txBody>
@@ -6161,7 +6348,7 @@
             </a:pPr>
             <a:r>
               <a:rPr/>
-              <a:t>Вопрос 20. Ошибки в конвейере</a:t>
+              <a:t>Вопрос 21. Путь к скачанной картинке</a:t>
             </a:r>
           </a:p>
         </p:txBody>
@@ -6190,23 +6377,27 @@
             </a:r>
             <a:r>
               <a:rPr/>
-              <a:t> Выводятся на экран</a:t>
-            </a:r>
-          </a:p>
-          <a:p>
-            <a:pPr lvl="0" indent="0" marL="0">
-              <a:buNone/>
-            </a:pPr>
-            <a:r>
-              <a:rPr/>
-              <a:t>По pipe передаётся только stdout.</a:t>
+              <a:t> /home/alex/Pictures/1.jpg</a:t>
+            </a:r>
+          </a:p>
+          <a:p>
+            <a:pPr lvl="0" indent="0" marL="0">
+              <a:buNone/>
+            </a:pPr>
+            <a:r>
+              <a:rPr b="1"/>
+              <a:t>Пояснение:</a:t>
+            </a:r>
+            <a:r>
+              <a:rPr/>
+              <a:t> -P задаёт директорию для сохранения, -O задаёт имя файла. Картинка сохранится как /home/alex/Pictures/1.jpg.</a:t>
             </a:r>
           </a:p>
         </p:txBody>
       </p:sp>
       <p:pic>
         <p:nvPicPr>
-          <p:cNvPr descr="image/23.png" id="0" name="Picture 1"/>
+          <p:cNvPr descr="image/24.png" id="0" name="Picture 1"/>
           <p:cNvPicPr>
             <a:picLocks noGrp="1" noChangeAspect="1"/>
           </p:cNvPicPr>
@@ -6220,8 +6411,8 @@
         </p:blipFill>
         <p:spPr bwMode="auto">
           <a:xfrm>
-            <a:off x="3568700" y="939800"/>
-            <a:ext cx="5105400" cy="2400300"/>
+            <a:off x="3568700" y="685800"/>
+            <a:ext cx="5105400" cy="2908300"/>
           </a:xfrm>
           <a:prstGeom prst="rect">
             <a:avLst/>
@@ -6259,7 +6450,7 @@
             </a:pPr>
             <a:r>
               <a:rPr/>
-              <a:t>Рисунок 22: Вопрос 20</a:t>
+              <a:t>Рисунок 22: Вопрос 21</a:t>
             </a:r>
           </a:p>
         </p:txBody>
@@ -6298,35 +6489,10 @@
         </p:nvSpPr>
         <p:spPr>
           <a:xfrm>
-            <a:off x="457201" y="204787"/>
-            <a:ext cx="3008313" cy="871538"/>
-          </a:xfrm>
-        </p:spPr>
-        <p:txBody>
-          <a:bodyPr/>
-          <a:lstStyle/>
-          <a:p>
-            <a:pPr lvl="0" indent="0" marL="0">
-              <a:buNone/>
-            </a:pPr>
-            <a:r>
-              <a:rPr/>
-              <a:t>Вопрос 21. Путь к скачанной картинке</a:t>
-            </a:r>
-          </a:p>
-        </p:txBody>
-      </p:sp>
-      <p:sp>
-        <p:nvSpPr>
-          <p:cNvPr id="4" name="Text Placeholder 3"/>
-          <p:cNvSpPr>
-            <a:spLocks noGrp="1"/>
-          </p:cNvSpPr>
-          <p:nvPr>
-            <p:ph idx="2" sz="half" type="body"/>
-          </p:nvPr>
-        </p:nvSpPr>
-        <p:spPr/>
+            <a:off x="722313" y="3305176"/>
+            <a:ext cx="7772400" cy="1021556"/>
+          </a:xfrm>
+        </p:spPr>
         <p:txBody>
           <a:bodyPr/>
           <a:lstStyle/>
@@ -6336,80 +6502,7 @@
             </a:pPr>
             <a:r>
               <a:rPr b="1"/>
-              <a:t>Ответ:</a:t>
-            </a:r>
-            <a:r>
-              <a:rPr/>
-              <a:t> /home/alex/Pictures/1.jpg</a:t>
-            </a:r>
-          </a:p>
-          <a:p>
-            <a:pPr lvl="0" indent="0" marL="0">
-              <a:buNone/>
-            </a:pPr>
-            <a:r>
-              <a:rPr/>
-              <a:t>-P — папка, -O — имя файла.</a:t>
-            </a:r>
-          </a:p>
-        </p:txBody>
-      </p:sp>
-      <p:pic>
-        <p:nvPicPr>
-          <p:cNvPr descr="image/24.png" id="0" name="Picture 1"/>
-          <p:cNvPicPr>
-            <a:picLocks noGrp="1" noChangeAspect="1"/>
-          </p:cNvPicPr>
-          <p:nvPr/>
-        </p:nvPicPr>
-        <p:blipFill>
-          <a:blip r:embed="rId2"/>
-          <a:stretch>
-            <a:fillRect/>
-          </a:stretch>
-        </p:blipFill>
-        <p:spPr bwMode="auto">
-          <a:xfrm>
-            <a:off x="3568700" y="685800"/>
-            <a:ext cx="5105400" cy="2908300"/>
-          </a:xfrm>
-          <a:prstGeom prst="rect">
-            <a:avLst/>
-          </a:prstGeom>
-          <a:noFill/>
-          <a:ln w="9525">
-            <a:noFill/>
-            <a:headEnd/>
-            <a:tailEnd/>
-          </a:ln>
-        </p:spPr>
-      </p:pic>
-      <p:sp>
-        <p:nvSpPr>
-          <p:cNvPr id="1" name="TextBox 3"/>
-          <p:cNvSpPr txBox="1"/>
-          <p:nvPr/>
-        </p:nvSpPr>
-        <p:spPr>
-          <a:xfrm>
-            <a:off x="3568700" y="4076700"/>
-            <a:ext cx="5105400" cy="508000"/>
-          </a:xfrm>
-          <a:prstGeom prst="rect">
-            <a:avLst/>
-          </a:prstGeom>
-          <a:noFill/>
-        </p:spPr>
-        <p:txBody>
-          <a:bodyPr/>
-          <a:lstStyle/>
-          <a:p>
-            <a:pPr lvl="0" indent="0" marL="0" algn="ctr">
-              <a:buNone/>
-            </a:pPr>
-            <a:r>
-              <a:rPr/>
-              <a:t>Рисунок 23: Вопрос 21</a:t>
+              <a:t>Вопросы 22-24. wget и архивация</a:t>
             </a:r>
           </a:p>
         </p:txBody>
@@ -6448,10 +6541,35 @@
         </p:nvSpPr>
         <p:spPr>
           <a:xfrm>
-            <a:off x="722313" y="3305176"/>
-            <a:ext cx="7772400" cy="1021556"/>
-          </a:xfrm>
-        </p:spPr>
+            <a:off x="457201" y="204787"/>
+            <a:ext cx="3008313" cy="871538"/>
+          </a:xfrm>
+        </p:spPr>
+        <p:txBody>
+          <a:bodyPr/>
+          <a:lstStyle/>
+          <a:p>
+            <a:pPr lvl="0" indent="0" marL="0">
+              <a:buNone/>
+            </a:pPr>
+            <a:r>
+              <a:rPr/>
+              <a:t>Вопрос 22. Тихий wget</a:t>
+            </a:r>
+          </a:p>
+        </p:txBody>
+      </p:sp>
+      <p:sp>
+        <p:nvSpPr>
+          <p:cNvPr id="4" name="Text Placeholder 3"/>
+          <p:cNvSpPr>
+            <a:spLocks noGrp="1"/>
+          </p:cNvSpPr>
+          <p:nvPr>
+            <p:ph idx="2" sz="half" type="body"/>
+          </p:nvPr>
+        </p:nvSpPr>
+        <p:spPr/>
         <p:txBody>
           <a:bodyPr/>
           <a:lstStyle/>
@@ -6461,7 +6579,84 @@
             </a:pPr>
             <a:r>
               <a:rPr b="1"/>
-              <a:t>Вопросы 22-24. wget и архивация</a:t>
+              <a:t>Ответ:</a:t>
+            </a:r>
+            <a:r>
+              <a:rPr/>
+              <a:t> -q или –quiet</a:t>
+            </a:r>
+          </a:p>
+          <a:p>
+            <a:pPr lvl="0" indent="0" marL="0">
+              <a:buNone/>
+            </a:pPr>
+            <a:r>
+              <a:rPr b="1"/>
+              <a:t>Пояснение:</a:t>
+            </a:r>
+            <a:r>
+              <a:rPr/>
+              <a:t> Опция -q (quiet) подавляет все сообщения wget, включая прогресс и подключения.</a:t>
+            </a:r>
+          </a:p>
+        </p:txBody>
+      </p:sp>
+      <p:pic>
+        <p:nvPicPr>
+          <p:cNvPr descr="image/25.png" id="0" name="Picture 1"/>
+          <p:cNvPicPr>
+            <a:picLocks noGrp="1" noChangeAspect="1"/>
+          </p:cNvPicPr>
+          <p:nvPr/>
+        </p:nvPicPr>
+        <p:blipFill>
+          <a:blip r:embed="rId2"/>
+          <a:stretch>
+            <a:fillRect/>
+          </a:stretch>
+        </p:blipFill>
+        <p:spPr bwMode="auto">
+          <a:xfrm>
+            <a:off x="3568700" y="1003300"/>
+            <a:ext cx="5105400" cy="2273300"/>
+          </a:xfrm>
+          <a:prstGeom prst="rect">
+            <a:avLst/>
+          </a:prstGeom>
+          <a:noFill/>
+          <a:ln w="9525">
+            <a:noFill/>
+            <a:headEnd/>
+            <a:tailEnd/>
+          </a:ln>
+        </p:spPr>
+      </p:pic>
+      <p:sp>
+        <p:nvSpPr>
+          <p:cNvPr id="1" name="TextBox 3"/>
+          <p:cNvSpPr txBox="1"/>
+          <p:nvPr/>
+        </p:nvSpPr>
+        <p:spPr>
+          <a:xfrm>
+            <a:off x="3568700" y="4076700"/>
+            <a:ext cx="5105400" cy="508000"/>
+          </a:xfrm>
+          <a:prstGeom prst="rect">
+            <a:avLst/>
+          </a:prstGeom>
+          <a:noFill/>
+        </p:spPr>
+        <p:txBody>
+          <a:bodyPr/>
+          <a:lstStyle/>
+          <a:p>
+            <a:pPr lvl="0" indent="0" marL="0" algn="ctr">
+              <a:buNone/>
+            </a:pPr>
+            <a:r>
+              <a:rPr/>
+              <a:t>Рисунок 23: Вопрос 22</a:t>
             </a:r>
           </a:p>
         </p:txBody>
@@ -6513,7 +6708,7 @@
             </a:pPr>
             <a:r>
               <a:rPr/>
-              <a:t>Вопрос 22. Тихий wget</a:t>
+              <a:t>Вопрос 23. wget -r -l 1 -A jpg</a:t>
             </a:r>
           </a:p>
         </p:txBody>
@@ -6542,23 +6737,27 @@
             </a:r>
             <a:r>
               <a:rPr/>
-              <a:t> -q или –quiet</a:t>
-            </a:r>
-          </a:p>
-          <a:p>
-            <a:pPr lvl="0" indent="0" marL="0">
-              <a:buNone/>
-            </a:pPr>
-            <a:r>
-              <a:rPr/>
-              <a:t>Подавляет все сообщения.</a:t>
+              <a:t> Только jpg</a:t>
+            </a:r>
+          </a:p>
+          <a:p>
+            <a:pPr lvl="0" indent="0" marL="0">
+              <a:buNone/>
+            </a:pPr>
+            <a:r>
+              <a:rPr b="1"/>
+              <a:t>Пояснение:</a:t>
+            </a:r>
+            <a:r>
+              <a:rPr/>
+              <a:t> Опция -A jpg ограничивает загрузку файлами с расширением jpg. HTML и png не качаются.</a:t>
             </a:r>
           </a:p>
         </p:txBody>
       </p:sp>
       <p:pic>
         <p:nvPicPr>
-          <p:cNvPr descr="image/25.png" id="0" name="Picture 1"/>
+          <p:cNvPr descr="image/26.png" id="0" name="Picture 1"/>
           <p:cNvPicPr>
             <a:picLocks noGrp="1" noChangeAspect="1"/>
           </p:cNvPicPr>
@@ -6572,8 +6771,8 @@
         </p:blipFill>
         <p:spPr bwMode="auto">
           <a:xfrm>
-            <a:off x="3568700" y="1003300"/>
-            <a:ext cx="5105400" cy="2273300"/>
+            <a:off x="3568700" y="685800"/>
+            <a:ext cx="5105400" cy="2908300"/>
           </a:xfrm>
           <a:prstGeom prst="rect">
             <a:avLst/>
@@ -6611,7 +6810,7 @@
             </a:pPr>
             <a:r>
               <a:rPr/>
-              <a:t>Рисунок 24: Вопрос 22</a:t>
+              <a:t>Рисунок 24: Вопрос 23</a:t>
             </a:r>
           </a:p>
         </p:txBody>
@@ -6663,7 +6862,7 @@
             </a:pPr>
             <a:r>
               <a:rPr/>
-              <a:t>Вопрос 23. wget -r -l 1 -A jpg</a:t>
+              <a:t>Вопрос 24. Отличие gzip от zip</a:t>
             </a:r>
           </a:p>
         </p:txBody>
@@ -6692,23 +6891,27 @@
             </a:r>
             <a:r>
               <a:rPr/>
-              <a:t> Только jpg</a:t>
-            </a:r>
-          </a:p>
-          <a:p>
-            <a:pPr lvl="0" indent="0" marL="0">
-              <a:buNone/>
-            </a:pPr>
-            <a:r>
-              <a:rPr/>
-              <a:t>-A jpg ограничивает расширение.</a:t>
+              <a:t> gzip удаляет архив после распаковки</a:t>
+            </a:r>
+          </a:p>
+          <a:p>
+            <a:pPr lvl="0" indent="0" marL="0">
+              <a:buNone/>
+            </a:pPr>
+            <a:r>
+              <a:rPr b="1"/>
+              <a:t>Пояснение:</a:t>
+            </a:r>
+            <a:r>
+              <a:rPr/>
+              <a:t> При распаковке gzip удаляет .gz-файл, оставляя только распакованный файл. zip этого не делает.</a:t>
             </a:r>
           </a:p>
         </p:txBody>
       </p:sp>
       <p:pic>
         <p:nvPicPr>
-          <p:cNvPr descr="image/26.png" id="0" name="Picture 1"/>
+          <p:cNvPr descr="image/27.png" id="0" name="Picture 1"/>
           <p:cNvPicPr>
             <a:picLocks noGrp="1" noChangeAspect="1"/>
           </p:cNvPicPr>
@@ -6722,8 +6925,8 @@
         </p:blipFill>
         <p:spPr bwMode="auto">
           <a:xfrm>
-            <a:off x="3568700" y="685800"/>
-            <a:ext cx="5105400" cy="2908300"/>
+            <a:off x="3568700" y="1066800"/>
+            <a:ext cx="5105400" cy="2159000"/>
           </a:xfrm>
           <a:prstGeom prst="rect">
             <a:avLst/>
@@ -6761,7 +6964,7 @@
             </a:pPr>
             <a:r>
               <a:rPr/>
-              <a:t>Рисунок 25: Вопрос 23</a:t>
+              <a:t>Рисунок 25: Вопрос 24</a:t>
             </a:r>
           </a:p>
         </p:txBody>
@@ -6813,7 +7016,7 @@
             </a:pPr>
             <a:r>
               <a:rPr/>
-              <a:t>Вопрос 24. Отличие gzip от zip</a:t>
+              <a:t>Вопрос 25. Архиваторы для папок</a:t>
             </a:r>
           </a:p>
         </p:txBody>
@@ -6842,14 +7045,27 @@
             </a:r>
             <a:r>
               <a:rPr/>
-              <a:t> gzip удаляет архив после распаковки</a:t>
+              <a:t> zip, tar</a:t>
+            </a:r>
+          </a:p>
+          <a:p>
+            <a:pPr lvl="0" indent="0" marL="0">
+              <a:buNone/>
+            </a:pPr>
+            <a:r>
+              <a:rPr b="1"/>
+              <a:t>Пояснение:</a:t>
+            </a:r>
+            <a:r>
+              <a:rPr/>
+              <a:t> gzip сжимает только один файл. Для архивации директорий используют tar (который сначала объединяет файлы в один) или zip.</a:t>
             </a:r>
           </a:p>
         </p:txBody>
       </p:sp>
       <p:pic>
         <p:nvPicPr>
-          <p:cNvPr descr="image/27.png" id="0" name="Picture 1"/>
+          <p:cNvPr descr="image/28.png" id="0" name="Picture 1"/>
           <p:cNvPicPr>
             <a:picLocks noGrp="1" noChangeAspect="1"/>
           </p:cNvPicPr>
@@ -6863,8 +7079,8 @@
         </p:blipFill>
         <p:spPr bwMode="auto">
           <a:xfrm>
-            <a:off x="3568700" y="1066800"/>
-            <a:ext cx="5105400" cy="2159000"/>
+            <a:off x="3568700" y="901700"/>
+            <a:ext cx="5105400" cy="2476500"/>
           </a:xfrm>
           <a:prstGeom prst="rect">
             <a:avLst/>
@@ -6902,7 +7118,7 @@
             </a:pPr>
             <a:r>
               <a:rPr/>
-              <a:t>Рисунок 26: Вопрос 24</a:t>
+              <a:t>Рисунок 26: Вопрос 25</a:t>
             </a:r>
           </a:p>
         </p:txBody>
@@ -6954,7 +7170,7 @@
             </a:pPr>
             <a:r>
               <a:rPr/>
-              <a:t>Вопрос 25. Архиваторы для папок</a:t>
+              <a:t>Вопрос 26. Опции tar для bz2</a:t>
             </a:r>
           </a:p>
         </p:txBody>
@@ -6983,23 +7199,27 @@
             </a:r>
             <a:r>
               <a:rPr/>
-              <a:t> zip, tar</a:t>
-            </a:r>
-          </a:p>
-          <a:p>
-            <a:pPr lvl="0" indent="0" marL="0">
-              <a:buNone/>
-            </a:pPr>
-            <a:r>
-              <a:rPr/>
-              <a:t>gzip только для одного файла.</a:t>
+              <a:t> -cjf</a:t>
+            </a:r>
+          </a:p>
+          <a:p>
+            <a:pPr lvl="0" indent="0" marL="0">
+              <a:buNone/>
+            </a:pPr>
+            <a:r>
+              <a:rPr b="1"/>
+              <a:t>Пояснение:</a:t>
+            </a:r>
+            <a:r>
+              <a:rPr/>
+              <a:t> -c — создание архива, -j — сжатие bzip2, -f — файл. -x распаковывает, -z для gzip, -t для просмотра.</a:t>
             </a:r>
           </a:p>
         </p:txBody>
       </p:sp>
       <p:pic>
         <p:nvPicPr>
-          <p:cNvPr descr="image/28.png" id="0" name="Picture 1"/>
+          <p:cNvPr descr="image/29.png" id="0" name="Picture 1"/>
           <p:cNvPicPr>
             <a:picLocks noGrp="1" noChangeAspect="1"/>
           </p:cNvPicPr>
@@ -7013,8 +7233,8 @@
         </p:blipFill>
         <p:spPr bwMode="auto">
           <a:xfrm>
-            <a:off x="3568700" y="901700"/>
-            <a:ext cx="5105400" cy="2476500"/>
+            <a:off x="3568700" y="863600"/>
+            <a:ext cx="5105400" cy="2552700"/>
           </a:xfrm>
           <a:prstGeom prst="rect">
             <a:avLst/>
@@ -7052,7 +7272,7 @@
             </a:pPr>
             <a:r>
               <a:rPr/>
-              <a:t>Рисунок 27: Вопрос 25</a:t>
+              <a:t>Рисунок 27: Вопрос 26</a:t>
             </a:r>
           </a:p>
         </p:txBody>
@@ -7143,35 +7363,10 @@
         </p:nvSpPr>
         <p:spPr>
           <a:xfrm>
-            <a:off x="457201" y="204787"/>
-            <a:ext cx="3008313" cy="871538"/>
-          </a:xfrm>
-        </p:spPr>
-        <p:txBody>
-          <a:bodyPr/>
-          <a:lstStyle/>
-          <a:p>
-            <a:pPr lvl="0" indent="0" marL="0">
-              <a:buNone/>
-            </a:pPr>
-            <a:r>
-              <a:rPr/>
-              <a:t>Вопрос 26. Опции tar для bz2</a:t>
-            </a:r>
-          </a:p>
-        </p:txBody>
-      </p:sp>
-      <p:sp>
-        <p:nvSpPr>
-          <p:cNvPr id="4" name="Text Placeholder 3"/>
-          <p:cNvSpPr>
-            <a:spLocks noGrp="1"/>
-          </p:cNvSpPr>
-          <p:nvPr>
-            <p:ph idx="2" sz="half" type="body"/>
-          </p:nvPr>
-        </p:nvSpPr>
-        <p:spPr/>
+            <a:off x="722313" y="3305176"/>
+            <a:ext cx="7772400" cy="1021556"/>
+          </a:xfrm>
+        </p:spPr>
         <p:txBody>
           <a:bodyPr/>
           <a:lstStyle/>
@@ -7181,80 +7376,7 @@
             </a:pPr>
             <a:r>
               <a:rPr b="1"/>
-              <a:t>Ответ:</a:t>
-            </a:r>
-            <a:r>
-              <a:rPr/>
-              <a:t> -cjf</a:t>
-            </a:r>
-          </a:p>
-          <a:p>
-            <a:pPr lvl="0" indent="0" marL="0">
-              <a:buNone/>
-            </a:pPr>
-            <a:r>
-              <a:rPr/>
-              <a:t>-c — создать, -j — bzip2, -f — файл.</a:t>
-            </a:r>
-          </a:p>
-        </p:txBody>
-      </p:sp>
-      <p:pic>
-        <p:nvPicPr>
-          <p:cNvPr descr="image/29.png" id="0" name="Picture 1"/>
-          <p:cNvPicPr>
-            <a:picLocks noGrp="1" noChangeAspect="1"/>
-          </p:cNvPicPr>
-          <p:nvPr/>
-        </p:nvPicPr>
-        <p:blipFill>
-          <a:blip r:embed="rId2"/>
-          <a:stretch>
-            <a:fillRect/>
-          </a:stretch>
-        </p:blipFill>
-        <p:spPr bwMode="auto">
-          <a:xfrm>
-            <a:off x="3568700" y="863600"/>
-            <a:ext cx="5105400" cy="2552700"/>
-          </a:xfrm>
-          <a:prstGeom prst="rect">
-            <a:avLst/>
-          </a:prstGeom>
-          <a:noFill/>
-          <a:ln w="9525">
-            <a:noFill/>
-            <a:headEnd/>
-            <a:tailEnd/>
-          </a:ln>
-        </p:spPr>
-      </p:pic>
-      <p:sp>
-        <p:nvSpPr>
-          <p:cNvPr id="1" name="TextBox 3"/>
-          <p:cNvSpPr txBox="1"/>
-          <p:nvPr/>
-        </p:nvSpPr>
-        <p:spPr>
-          <a:xfrm>
-            <a:off x="3568700" y="4076700"/>
-            <a:ext cx="5105400" cy="508000"/>
-          </a:xfrm>
-          <a:prstGeom prst="rect">
-            <a:avLst/>
-          </a:prstGeom>
-          <a:noFill/>
-        </p:spPr>
-        <p:txBody>
-          <a:bodyPr/>
-          <a:lstStyle/>
-          <a:p>
-            <a:pPr lvl="0" indent="0" marL="0" algn="ctr">
-              <a:buNone/>
-            </a:pPr>
-            <a:r>
-              <a:rPr/>
-              <a:t>Рисунок 28: Вопрос 26</a:t>
+              <a:t>Вопросы 27-29. Поиск и grep</a:t>
             </a:r>
           </a:p>
         </p:txBody>
@@ -7293,10 +7415,35 @@
         </p:nvSpPr>
         <p:spPr>
           <a:xfrm>
-            <a:off x="722313" y="3305176"/>
-            <a:ext cx="7772400" cy="1021556"/>
-          </a:xfrm>
-        </p:spPr>
+            <a:off x="457201" y="204787"/>
+            <a:ext cx="3008313" cy="871538"/>
+          </a:xfrm>
+        </p:spPr>
+        <p:txBody>
+          <a:bodyPr/>
+          <a:lstStyle/>
+          <a:p>
+            <a:pPr lvl="0" indent="0" marL="0">
+              <a:buNone/>
+            </a:pPr>
+            <a:r>
+              <a:rPr/>
+              <a:t>Вопрос 27. Маски find НЕ найдут Alexey.jpeg</a:t>
+            </a:r>
+          </a:p>
+        </p:txBody>
+      </p:sp>
+      <p:sp>
+        <p:nvSpPr>
+          <p:cNvPr id="4" name="Text Placeholder 3"/>
+          <p:cNvSpPr>
+            <a:spLocks noGrp="1"/>
+          </p:cNvSpPr>
+          <p:nvPr>
+            <p:ph idx="2" sz="half" type="body"/>
+          </p:nvPr>
+        </p:nvSpPr>
+        <p:spPr/>
         <p:txBody>
           <a:bodyPr/>
           <a:lstStyle/>
@@ -7306,7 +7453,100 @@
             </a:pPr>
             <a:r>
               <a:rPr b="1"/>
-              <a:t>Вопросы 27-29. Поиск и grep</a:t>
+              <a:t>Ответ:</a:t>
+            </a:r>
+            <a:r>
+              <a:rPr/>
+              <a:t> - </a:t>
+            </a:r>
+            <a:r>
+              <a:rPr i="1"/>
+              <a:t>..? - </a:t>
+            </a:r>
+            <a:r>
+              <a:rPr/>
+              <a:t>jpg - alexey.*</a:t>
+            </a:r>
+          </a:p>
+          <a:p>
+            <a:pPr lvl="0" indent="0" marL="0">
+              <a:buNone/>
+            </a:pPr>
+            <a:r>
+              <a:rPr b="1"/>
+              <a:t>Пояснение:</a:t>
+            </a:r>
+            <a:r>
+              <a:rPr/>
+              <a:t> </a:t>
+            </a:r>
+            <a:r>
+              <a:rPr i="1"/>
+              <a:t>..? — ищет файлы, где перед последним символом две точки. </a:t>
+            </a:r>
+            <a:r>
+              <a:rPr/>
+              <a:t>jpg — ищет .jpg, а нужно .jpeg. alexey.* — имя с маленькой буквы, а в файле с большой.</a:t>
+            </a:r>
+          </a:p>
+        </p:txBody>
+      </p:sp>
+      <p:pic>
+        <p:nvPicPr>
+          <p:cNvPr descr="image/30.png" id="0" name="Picture 1"/>
+          <p:cNvPicPr>
+            <a:picLocks noGrp="1" noChangeAspect="1"/>
+          </p:cNvPicPr>
+          <p:nvPr/>
+        </p:nvPicPr>
+        <p:blipFill>
+          <a:blip r:embed="rId2"/>
+          <a:stretch>
+            <a:fillRect/>
+          </a:stretch>
+        </p:blipFill>
+        <p:spPr bwMode="auto">
+          <a:xfrm>
+            <a:off x="3568700" y="546100"/>
+            <a:ext cx="5105400" cy="3187700"/>
+          </a:xfrm>
+          <a:prstGeom prst="rect">
+            <a:avLst/>
+          </a:prstGeom>
+          <a:noFill/>
+          <a:ln w="9525">
+            <a:noFill/>
+            <a:headEnd/>
+            <a:tailEnd/>
+          </a:ln>
+        </p:spPr>
+      </p:pic>
+      <p:sp>
+        <p:nvSpPr>
+          <p:cNvPr id="1" name="TextBox 3"/>
+          <p:cNvSpPr txBox="1"/>
+          <p:nvPr/>
+        </p:nvSpPr>
+        <p:spPr>
+          <a:xfrm>
+            <a:off x="3568700" y="4076700"/>
+            <a:ext cx="5105400" cy="508000"/>
+          </a:xfrm>
+          <a:prstGeom prst="rect">
+            <a:avLst/>
+          </a:prstGeom>
+          <a:noFill/>
+        </p:spPr>
+        <p:txBody>
+          <a:bodyPr/>
+          <a:lstStyle/>
+          <a:p>
+            <a:pPr lvl="0" indent="0" marL="0" algn="ctr">
+              <a:buNone/>
+            </a:pPr>
+            <a:r>
+              <a:rPr/>
+              <a:t>Рисунок 28: Вопрос 27</a:t>
             </a:r>
           </a:p>
         </p:txBody>
@@ -7358,7 +7598,7 @@
             </a:pPr>
             <a:r>
               <a:rPr/>
-              <a:t>Вопрос 27. Маски find НЕ найдут Alexey.jpeg</a:t>
+              <a:t>Вопрос 28. grep “world”</a:t>
             </a:r>
           </a:p>
         </p:txBody>
@@ -7387,31 +7627,27 @@
             </a:r>
             <a:r>
               <a:rPr/>
-              <a:t> - </a:t>
-            </a:r>
-            <a:r>
-              <a:rPr i="1"/>
-              <a:t>..? - </a:t>
-            </a:r>
-            <a:r>
-              <a:rPr/>
-              <a:t>jpg - alexey.*</a:t>
-            </a:r>
-          </a:p>
-          <a:p>
-            <a:pPr lvl="0" indent="0" marL="0">
-              <a:buNone/>
-            </a:pPr>
-            <a:r>
-              <a:rPr/>
-              <a:t>Регистр важен, расширение .jpeg, не .jpg.</a:t>
+              <a:t> - world - The beautiful-world is not enough - The world is not enough - The beautifulworld is not enough</a:t>
+            </a:r>
+          </a:p>
+          <a:p>
+            <a:pPr lvl="0" indent="0" marL="0">
+              <a:buNone/>
+            </a:pPr>
+            <a:r>
+              <a:rPr b="1"/>
+              <a:t>Пояснение:</a:t>
+            </a:r>
+            <a:r>
+              <a:rPr/>
+              <a:t> grep ищет точное вхождение “world”. Регистр важен, поэтому World с большой буквы не подходит. Слова с дефисом подходят, если внутри есть “world”.</a:t>
             </a:r>
           </a:p>
         </p:txBody>
       </p:sp>
       <p:pic>
         <p:nvPicPr>
-          <p:cNvPr descr="image/30.png" id="0" name="Picture 1"/>
+          <p:cNvPr descr="image/31.png" id="0" name="Picture 1"/>
           <p:cNvPicPr>
             <a:picLocks noGrp="1" noChangeAspect="1"/>
           </p:cNvPicPr>
@@ -7425,8 +7661,8 @@
         </p:blipFill>
         <p:spPr bwMode="auto">
           <a:xfrm>
-            <a:off x="3568700" y="546100"/>
-            <a:ext cx="5105400" cy="3187700"/>
+            <a:off x="3568700" y="787400"/>
+            <a:ext cx="5105400" cy="2705100"/>
           </a:xfrm>
           <a:prstGeom prst="rect">
             <a:avLst/>
@@ -7464,7 +7700,7 @@
             </a:pPr>
             <a:r>
               <a:rPr/>
-              <a:t>Рисунок 29: Вопрос 27</a:t>
+              <a:t>Рисунок 29: Вопрос 28</a:t>
             </a:r>
           </a:p>
         </p:txBody>
@@ -7516,7 +7752,7 @@
             </a:pPr>
             <a:r>
               <a:rPr/>
-              <a:t>Вопрос 28. grep “world”</a:t>
+              <a:t>Вопрос 29. Поиск “love” у Шекспира</a:t>
             </a:r>
           </a:p>
         </p:txBody>
@@ -7545,166 +7781,20 @@
             </a:r>
             <a:r>
               <a:rPr/>
-              <a:t> - world - The beautiful-world is not enough - The world is not enough - The beautifulworld is not enough</a:t>
-            </a:r>
-          </a:p>
-          <a:p>
-            <a:pPr lvl="0" indent="0" marL="0">
-              <a:buNone/>
-            </a:pPr>
-            <a:r>
-              <a:rPr/>
-              <a:t>Регистр важен, подстрока “world” должна быть точно.</a:t>
-            </a:r>
-          </a:p>
-        </p:txBody>
-      </p:sp>
-      <p:pic>
-        <p:nvPicPr>
-          <p:cNvPr descr="image/31.png" id="0" name="Picture 1"/>
-          <p:cNvPicPr>
-            <a:picLocks noGrp="1" noChangeAspect="1"/>
-          </p:cNvPicPr>
-          <p:nvPr/>
-        </p:nvPicPr>
-        <p:blipFill>
-          <a:blip r:embed="rId2"/>
-          <a:stretch>
-            <a:fillRect/>
-          </a:stretch>
-        </p:blipFill>
-        <p:spPr bwMode="auto">
-          <a:xfrm>
-            <a:off x="3568700" y="787400"/>
-            <a:ext cx="5105400" cy="2705100"/>
-          </a:xfrm>
-          <a:prstGeom prst="rect">
-            <a:avLst/>
-          </a:prstGeom>
-          <a:noFill/>
-          <a:ln w="9525">
-            <a:noFill/>
-            <a:headEnd/>
-            <a:tailEnd/>
-          </a:ln>
-        </p:spPr>
-      </p:pic>
-      <p:sp>
-        <p:nvSpPr>
-          <p:cNvPr id="1" name="TextBox 3"/>
-          <p:cNvSpPr txBox="1"/>
-          <p:nvPr/>
-        </p:nvSpPr>
-        <p:spPr>
-          <a:xfrm>
-            <a:off x="3568700" y="4076700"/>
-            <a:ext cx="5105400" cy="508000"/>
-          </a:xfrm>
-          <a:prstGeom prst="rect">
-            <a:avLst/>
-          </a:prstGeom>
-          <a:noFill/>
-        </p:spPr>
-        <p:txBody>
-          <a:bodyPr/>
-          <a:lstStyle/>
-          <a:p>
-            <a:pPr lvl="0" indent="0" marL="0" algn="ctr">
-              <a:buNone/>
-            </a:pPr>
-            <a:r>
-              <a:rPr/>
-              <a:t>Рисунок 30: Вопрос 28</a:t>
-            </a:r>
-          </a:p>
-        </p:txBody>
-      </p:sp>
-    </p:spTree>
-  </p:cSld>
-</p:sld>
-</file>
-
-<file path=ppt/slides/slide44.xml><?xml version="1.0" encoding="utf-8"?>
-<p:sld xmlns:a="http://schemas.openxmlformats.org/drawingml/2006/main" xmlns:r="http://schemas.openxmlformats.org/officeDocument/2006/relationships" xmlns:p="http://schemas.openxmlformats.org/presentationml/2006/main">
-  <p:cSld>
-    <p:spTree>
-      <p:nvGrpSpPr>
-        <p:cNvPr id="1" name=""/>
-        <p:cNvGrpSpPr/>
-        <p:nvPr/>
-      </p:nvGrpSpPr>
-      <p:grpSpPr>
-        <a:xfrm>
-          <a:off x="0" y="0"/>
-          <a:ext cx="0" cy="0"/>
-          <a:chOff x="0" y="0"/>
-          <a:chExt cx="0" cy="0"/>
-        </a:xfrm>
-      </p:grpSpPr>
-      <p:sp>
-        <p:nvSpPr>
-          <p:cNvPr id="2" name="Title 1"/>
-          <p:cNvSpPr>
-            <a:spLocks noGrp="1"/>
-          </p:cNvSpPr>
-          <p:nvPr>
-            <p:ph type="title"/>
-          </p:nvPr>
-        </p:nvSpPr>
-        <p:spPr>
-          <a:xfrm>
-            <a:off x="457201" y="204787"/>
-            <a:ext cx="3008313" cy="871538"/>
-          </a:xfrm>
-        </p:spPr>
-        <p:txBody>
-          <a:bodyPr/>
-          <a:lstStyle/>
-          <a:p>
-            <a:pPr lvl="0" indent="0" marL="0">
-              <a:buNone/>
-            </a:pPr>
-            <a:r>
-              <a:rPr/>
-              <a:t>Вопрос 29. Поиск “love” у Шекспира</a:t>
-            </a:r>
-          </a:p>
-        </p:txBody>
-      </p:sp>
-      <p:sp>
-        <p:nvSpPr>
-          <p:cNvPr id="4" name="Text Placeholder 3"/>
-          <p:cNvSpPr>
-            <a:spLocks noGrp="1"/>
-          </p:cNvSpPr>
-          <p:nvPr>
-            <p:ph idx="2" sz="half" type="body"/>
-          </p:nvPr>
-        </p:nvSpPr>
-        <p:spPr/>
-        <p:txBody>
-          <a:bodyPr/>
-          <a:lstStyle/>
+              <a:t> Файл love_lines.txt</a:t>
+            </a:r>
+          </a:p>
           <a:p>
             <a:pPr lvl="0" indent="0" marL="0">
               <a:buNone/>
             </a:pPr>
             <a:r>
               <a:rPr b="1"/>
-              <a:t>Ответ:</a:t>
-            </a:r>
-            <a:r>
-              <a:rPr/>
-              <a:t> Файл love_lines.txt</a:t>
-            </a:r>
-          </a:p>
-          <a:p>
-            <a:pPr lvl="0" indent="0" marL="0">
-              <a:buNone/>
-            </a:pPr>
-            <a:r>
-              <a:rPr/>
-              <a:t>grep -h “love” *.txt &gt; love_lines.txt</a:t>
+              <a:t>Пояснение:</a:t>
+            </a:r>
+            <a:r>
+              <a:rPr/>
+              <a:t> Архив скачан, распакован, зашла в папку и выполнила grep -h “love” *.txt &gt; love_lines.txt. Получился файл со всеми строчками, где есть love.</a:t>
             </a:r>
           </a:p>
         </p:txBody>
@@ -7764,7 +7854,7 @@
             </a:pPr>
             <a:r>
               <a:rPr/>
-              <a:t>Рисунок 31: Вопрос 29</a:t>
+              <a:t>Рисунок 30: Вопрос 29</a:t>
             </a:r>
           </a:p>
         </p:txBody>
@@ -7774,7 +7864,7 @@
 </p:sld>
 </file>
 
-<file path=ppt/slides/slide45.xml><?xml version="1.0" encoding="utf-8"?>
+<file path=ppt/slides/slide44.xml><?xml version="1.0" encoding="utf-8"?>
 <p:sld xmlns:a="http://schemas.openxmlformats.org/drawingml/2006/main" xmlns:r="http://schemas.openxmlformats.org/officeDocument/2006/relationships" xmlns:p="http://schemas.openxmlformats.org/presentationml/2006/main">
   <p:cSld>
     <p:spTree>
@@ -7846,7 +7936,59 @@
             </a:pPr>
             <a:r>
               <a:rPr/>
-              <a:t>Рисунок 32: Вопрос 29 продолжение</a:t>
+              <a:t>Рисунок 31: Вопрос 29</a:t>
+            </a:r>
+          </a:p>
+        </p:txBody>
+      </p:sp>
+    </p:spTree>
+  </p:cSld>
+</p:sld>
+</file>
+
+<file path=ppt/slides/slide45.xml><?xml version="1.0" encoding="utf-8"?>
+<p:sld xmlns:a="http://schemas.openxmlformats.org/drawingml/2006/main" xmlns:r="http://schemas.openxmlformats.org/officeDocument/2006/relationships" xmlns:p="http://schemas.openxmlformats.org/presentationml/2006/main">
+  <p:cSld>
+    <p:spTree>
+      <p:nvGrpSpPr>
+        <p:cNvPr id="1" name=""/>
+        <p:cNvGrpSpPr/>
+        <p:nvPr/>
+      </p:nvGrpSpPr>
+      <p:grpSpPr>
+        <a:xfrm>
+          <a:off x="0" y="0"/>
+          <a:ext cx="0" cy="0"/>
+          <a:chOff x="0" y="0"/>
+          <a:chExt cx="0" cy="0"/>
+        </a:xfrm>
+      </p:grpSpPr>
+      <p:sp>
+        <p:nvSpPr>
+          <p:cNvPr id="2" name="Title 1"/>
+          <p:cNvSpPr>
+            <a:spLocks noGrp="1"/>
+          </p:cNvSpPr>
+          <p:nvPr>
+            <p:ph type="title"/>
+          </p:nvPr>
+        </p:nvSpPr>
+        <p:spPr>
+          <a:xfrm>
+            <a:off x="722313" y="3305176"/>
+            <a:ext cx="7772400" cy="1021556"/>
+          </a:xfrm>
+        </p:spPr>
+        <p:txBody>
+          <a:bodyPr/>
+          <a:lstStyle/>
+          <a:p>
+            <a:pPr lvl="0" indent="0" marL="0">
+              <a:buNone/>
+            </a:pPr>
+            <a:r>
+              <a:rPr b="1"/>
+              <a:t>Выводы</a:t>
             </a:r>
           </a:p>
         </p:txBody>
@@ -7883,186 +8025,6 @@
             <p:ph type="title"/>
           </p:nvPr>
         </p:nvSpPr>
-        <p:spPr>
-          <a:xfrm>
-            <a:off x="722313" y="3305176"/>
-            <a:ext cx="7772400" cy="1021556"/>
-          </a:xfrm>
-        </p:spPr>
-        <p:txBody>
-          <a:bodyPr/>
-          <a:lstStyle/>
-          <a:p>
-            <a:pPr lvl="0" indent="0" marL="0">
-              <a:buNone/>
-            </a:pPr>
-            <a:r>
-              <a:rPr b="1"/>
-              <a:t>Вопрос 30. tmux</a:t>
-            </a:r>
-          </a:p>
-        </p:txBody>
-      </p:sp>
-    </p:spTree>
-  </p:cSld>
-</p:sld>
-</file>
-
-<file path=ppt/slides/slide47.xml><?xml version="1.0" encoding="utf-8"?>
-<p:sld xmlns:a="http://schemas.openxmlformats.org/drawingml/2006/main" xmlns:r="http://schemas.openxmlformats.org/officeDocument/2006/relationships" xmlns:p="http://schemas.openxmlformats.org/presentationml/2006/main">
-  <p:cSld>
-    <p:spTree>
-      <p:nvGrpSpPr>
-        <p:cNvPr id="1" name=""/>
-        <p:cNvGrpSpPr/>
-        <p:nvPr/>
-      </p:nvGrpSpPr>
-      <p:grpSpPr>
-        <a:xfrm>
-          <a:off x="0" y="0"/>
-          <a:ext cx="0" cy="0"/>
-          <a:chOff x="0" y="0"/>
-          <a:chExt cx="0" cy="0"/>
-        </a:xfrm>
-      </p:grpSpPr>
-      <p:sp>
-        <p:nvSpPr>
-          <p:cNvPr id="2" name="Title 1"/>
-          <p:cNvSpPr>
-            <a:spLocks noGrp="1"/>
-          </p:cNvSpPr>
-          <p:nvPr>
-            <p:ph type="title"/>
-          </p:nvPr>
-        </p:nvSpPr>
-        <p:spPr/>
-        <p:txBody>
-          <a:bodyPr/>
-          <a:lstStyle/>
-          <a:p>
-            <a:pPr lvl="0" indent="0" marL="0">
-              <a:buNone/>
-            </a:pPr>
-            <a:r>
-              <a:rPr/>
-              <a:t>Разделение вкладок в tmux</a:t>
-            </a:r>
-          </a:p>
-        </p:txBody>
-      </p:sp>
-      <p:sp>
-        <p:nvSpPr>
-          <p:cNvPr id="3" name="Content Placeholder 2"/>
-          <p:cNvSpPr>
-            <a:spLocks noGrp="1"/>
-          </p:cNvSpPr>
-          <p:nvPr>
-            <p:ph idx="1"/>
-          </p:nvPr>
-        </p:nvSpPr>
-        <p:spPr/>
-        <p:txBody>
-          <a:bodyPr/>
-          <a:lstStyle/>
-          <a:p>
-            <a:pPr lvl="0" indent="0" marL="0">
-              <a:buNone/>
-            </a:pPr>
-            <a:r>
-              <a:rPr b="1"/>
-              <a:t>Ответ:</a:t>
-            </a:r>
-            <a:r>
-              <a:rPr/>
-              <a:t> - Вкладку можно делить и горизонтально, и вертикально, и много раз - Разделение работает только в текущей вкладке - Закрыть часть — Ctrl+B и x - exit в части закрывает всю вкладку</a:t>
-            </a:r>
-          </a:p>
-        </p:txBody>
-      </p:sp>
-    </p:spTree>
-  </p:cSld>
-</p:sld>
-</file>
-
-<file path=ppt/slides/slide48.xml><?xml version="1.0" encoding="utf-8"?>
-<p:sld xmlns:a="http://schemas.openxmlformats.org/drawingml/2006/main" xmlns:r="http://schemas.openxmlformats.org/officeDocument/2006/relationships" xmlns:p="http://schemas.openxmlformats.org/presentationml/2006/main">
-  <p:cSld>
-    <p:spTree>
-      <p:nvGrpSpPr>
-        <p:cNvPr id="1" name=""/>
-        <p:cNvGrpSpPr/>
-        <p:nvPr/>
-      </p:nvGrpSpPr>
-      <p:grpSpPr>
-        <a:xfrm>
-          <a:off x="0" y="0"/>
-          <a:ext cx="0" cy="0"/>
-          <a:chOff x="0" y="0"/>
-          <a:chExt cx="0" cy="0"/>
-        </a:xfrm>
-      </p:grpSpPr>
-      <p:sp>
-        <p:nvSpPr>
-          <p:cNvPr id="2" name="Title 1"/>
-          <p:cNvSpPr>
-            <a:spLocks noGrp="1"/>
-          </p:cNvSpPr>
-          <p:nvPr>
-            <p:ph type="title"/>
-          </p:nvPr>
-        </p:nvSpPr>
-        <p:spPr>
-          <a:xfrm>
-            <a:off x="722313" y="3305176"/>
-            <a:ext cx="7772400" cy="1021556"/>
-          </a:xfrm>
-        </p:spPr>
-        <p:txBody>
-          <a:bodyPr/>
-          <a:lstStyle/>
-          <a:p>
-            <a:pPr lvl="0" indent="0" marL="0">
-              <a:buNone/>
-            </a:pPr>
-            <a:r>
-              <a:rPr b="1"/>
-              <a:t>Выводы</a:t>
-            </a:r>
-          </a:p>
-        </p:txBody>
-      </p:sp>
-    </p:spTree>
-  </p:cSld>
-</p:sld>
-</file>
-
-<file path=ppt/slides/slide49.xml><?xml version="1.0" encoding="utf-8"?>
-<p:sld xmlns:a="http://schemas.openxmlformats.org/drawingml/2006/main" xmlns:r="http://schemas.openxmlformats.org/officeDocument/2006/relationships" xmlns:p="http://schemas.openxmlformats.org/presentationml/2006/main">
-  <p:cSld>
-    <p:spTree>
-      <p:nvGrpSpPr>
-        <p:cNvPr id="1" name=""/>
-        <p:cNvGrpSpPr/>
-        <p:nvPr/>
-      </p:nvGrpSpPr>
-      <p:grpSpPr>
-        <a:xfrm>
-          <a:off x="0" y="0"/>
-          <a:ext cx="0" cy="0"/>
-          <a:chOff x="0" y="0"/>
-          <a:chExt cx="0" cy="0"/>
-        </a:xfrm>
-      </p:grpSpPr>
-      <p:sp>
-        <p:nvSpPr>
-          <p:cNvPr id="2" name="Title 1"/>
-          <p:cNvSpPr>
-            <a:spLocks noGrp="1"/>
-          </p:cNvSpPr>
-          <p:nvPr>
-            <p:ph type="title"/>
-          </p:nvPr>
-        </p:nvSpPr>
         <p:spPr/>
         <p:txBody>
           <a:bodyPr/>
@@ -8353,8 +8315,12 @@
               <a:buNone/>
             </a:pPr>
             <a:r>
-              <a:rPr/>
-              <a:t>Курс про основы Linux, остальные варианты не подходят.</a:t>
+              <a:rPr b="1"/>
+              <a:t>Пояснение:</a:t>
+            </a:r>
+            <a:r>
+              <a:rPr/>
+              <a:t> Курс посвящён основам работы в операционной системе Linux, что соответствует его названию. Остальные варианты (Python, молекулярная биология, KDE, Windows) не имеют отношения к содержанию.</a:t>
             </a:r>
           </a:p>
         </p:txBody>
@@ -8498,6 +8464,19 @@
               <a:t> - Не выкладывать решения - Дедлайнов нет - Решать самостоятельно</a:t>
             </a:r>
           </a:p>
+          <a:p>
+            <a:pPr lvl="0" indent="0" marL="0">
+              <a:buNone/>
+            </a:pPr>
+            <a:r>
+              <a:rPr b="1"/>
+              <a:t>Пояснение:</a:t>
+            </a:r>
+            <a:r>
+              <a:rPr/>
+              <a:t> В курсе действительно нет дедлайнов, баллы за неверные попытки не снимаются, а публикация решений запрещена — это написано в правилах.</a:t>
+            </a:r>
+          </a:p>
         </p:txBody>
       </p:sp>
       <p:pic>
@@ -8637,6 +8616,19 @@
             <a:r>
               <a:rPr/>
               <a:t> Windows / Linux (какая есть)</a:t>
+            </a:r>
+          </a:p>
+          <a:p>
+            <a:pPr lvl="0" indent="0" marL="0">
+              <a:buNone/>
+            </a:pPr>
+            <a:r>
+              <a:rPr b="1"/>
+              <a:t>Пояснение:</a:t>
+            </a:r>
+            <a:r>
+              <a:rPr/>
+              <a:t> Я выбрала ту операционную систему, которая у меня установлена на основном компьютере.</a:t>
             </a:r>
           </a:p>
         </p:txBody>

--- a/stepik/razdel/01/presentation/output/presentation_stepik_1.pptx
+++ b/stepik/razdel/01/presentation/output/presentation_stepik_1.pptx
@@ -6390,7 +6390,7 @@
             </a:r>
             <a:r>
               <a:rPr/>
-              <a:t> -P задаёт директорию для сохранения, -O задаёт имя файла. Картинка сохранится как /home/alex/Pictures/1.jpg.</a:t>
+              <a:t> -P задаёт директорию для сохранения, -O задаёт имя файла. Картинка сохранится как /home/alex/1.jpg.</a:t>
             </a:r>
           </a:p>
         </p:txBody>
@@ -6737,7 +6737,7 @@
             </a:r>
             <a:r>
               <a:rPr/>
-              <a:t> Только jpg</a:t>
+              <a:t> Будут скачаны только jpg файлы (html файлы скачаются, но потом удалятся)</a:t>
             </a:r>
           </a:p>
           <a:p>
@@ -6750,7 +6750,37 @@
             </a:r>
             <a:r>
               <a:rPr/>
-              <a:t> Опция -A jpg ограничивает загрузку файлами с расширением jpg. HTML и png не качаются.</a:t>
+              <a:t> Опция </a:t>
+            </a:r>
+            <a:r>
+              <a:rPr>
+                <a:latin typeface="Courier"/>
+              </a:rPr>
+              <a:t>-A jpg</a:t>
+            </a:r>
+            <a:r>
+              <a:rPr/>
+              <a:t> ограничивает загрузку файлами с расширением jpg. HTML-файлы сначала скачиваются (так как </a:t>
+            </a:r>
+            <a:r>
+              <a:rPr>
+                <a:latin typeface="Courier"/>
+              </a:rPr>
+              <a:t>wget</a:t>
+            </a:r>
+            <a:r>
+              <a:rPr/>
+              <a:t> рекурсивно обходит страницы), но затем удаляются, потому что их расширение не соответствует </a:t>
+            </a:r>
+            <a:r>
+              <a:rPr>
+                <a:latin typeface="Courier"/>
+              </a:rPr>
+              <a:t>-A jpg</a:t>
+            </a:r>
+            <a:r>
+              <a:rPr/>
+              <a:t>. В результате остаются только jpg.</a:t>
             </a:r>
           </a:p>
         </p:txBody>
@@ -7627,7 +7657,7 @@
             </a:r>
             <a:r>
               <a:rPr/>
-              <a:t> - world - The beautiful-world is not enough - The world is not enough - The beautifulworld is not enough</a:t>
+              <a:t> - world - The beautiful-world is not enough - The world is not enough - The world is not “enough” - The beautifulworld is not enough</a:t>
             </a:r>
           </a:p>
           <a:p>
